--- a/content/W01/D1/C2_W01_D01_deck_half2_STUDENT.pptx
+++ b/content/W01/D1/C2_W01_D01_deck_half2_STUDENT.pptx
@@ -9386,7 +9386,7 @@
                 </a:solidFill>
                 <a:latin typeface="Calibri"/>
               </a:rPr>
-              <a:t>You met this error in half one on a value you typed yourself. Here it is on a record that was handed to you.</a:t>
+              <a:t>You met this error in half one, and here it is inside the cell you are typing yourself.</a:t>
             </a:r>
           </a:p>
         </p:txBody>

--- a/content/W01/D1/C2_W01_D01_deck_half2_STUDENT.pptx
+++ b/content/W01/D1/C2_W01_D01_deck_half2_STUDENT.pptx
@@ -3206,7 +3206,7 @@
         <p:spPr>
           <a:xfrm>
             <a:off x="777240" y="1965960"/>
-            <a:ext cx="10607040" cy="4206240"/>
+            <a:ext cx="10607040" cy="914400"/>
           </a:xfrm>
           <a:prstGeom prst="rect">
             <a:avLst/>
@@ -3219,9 +3219,13 @@
           </a:bodyPr>
           <a:lstStyle/>
           <a:p>
-            <a:pPr algn="l"/>
-            <a:r>
-              <a:rPr b="0" sz="2100">
+            <a:pPr>
+              <a:spcAft>
+                <a:spcPts val="1000"/>
+              </a:spcAft>
+            </a:pPr>
+            <a:r>
+              <a:rPr sz="2100" b="0">
                 <a:solidFill>
                   <a:srgbClr val="1C1C1A"/>
                 </a:solidFill>
@@ -3231,26 +3235,18 @@
             </a:r>
           </a:p>
           <a:p>
-            <a:pPr algn="l"/>
-            <a:r>
-              <a:rPr b="0" sz="2100">
+            <a:pPr>
+              <a:spcAft>
+                <a:spcPts val="1000"/>
+              </a:spcAft>
+            </a:pPr>
+            <a:r>
+              <a:rPr sz="2100" b="0">
                 <a:solidFill>
                   <a:srgbClr val="1C1C1A"/>
                 </a:solidFill>
                 <a:latin typeface="Calibri"/>
               </a:rPr>
-              <a:t> </a:t>
-            </a:r>
-          </a:p>
-          <a:p>
-            <a:pPr algn="l"/>
-            <a:r>
-              <a:rPr b="0" sz="2100">
-                <a:solidFill>
-                  <a:srgbClr val="1C1C1A"/>
-                </a:solidFill>
-                <a:latin typeface="Calibri"/>
-              </a:rPr>
               <a:t>This half points all three at a question somebody actually asked.</a:t>
             </a:r>
           </a:p>
@@ -3264,7 +3260,7 @@
         </p:nvSpPr>
         <p:spPr>
           <a:xfrm>
-            <a:off x="777240" y="6263640"/>
+            <a:off x="777240" y="6309360"/>
             <a:ext cx="10607040" cy="365760"/>
           </a:xfrm>
           <a:prstGeom prst="rect">
@@ -3273,13 +3269,13 @@
           <a:noFill/>
         </p:spPr>
         <p:txBody>
-          <a:bodyPr wrap="square">
-            <a:spAutoFit/>
-          </a:bodyPr>
-          <a:lstStyle/>
-          <a:p>
-            <a:r>
-              <a:rPr sz="1000" b="0">
+          <a:bodyPr wrap="none">
+            <a:spAutoFit/>
+          </a:bodyPr>
+          <a:lstStyle/>
+          <a:p>
+            <a:r>
+              <a:rPr sz="1000">
                 <a:solidFill>
                   <a:srgbClr val="5F6360"/>
                 </a:solidFill>
@@ -3395,7 +3391,7 @@
         <p:spPr>
           <a:xfrm>
             <a:off x="777240" y="1965960"/>
-            <a:ext cx="10607040" cy="4206240"/>
+            <a:ext cx="10607040" cy="1533525"/>
           </a:xfrm>
           <a:prstGeom prst="rect">
             <a:avLst/>
@@ -3408,9 +3404,13 @@
           </a:bodyPr>
           <a:lstStyle/>
           <a:p>
-            <a:pPr algn="l"/>
-            <a:r>
-              <a:rPr b="0" sz="2100">
+            <a:pPr>
+              <a:spcAft>
+                <a:spcPts val="1000"/>
+              </a:spcAft>
+            </a:pPr>
+            <a:r>
+              <a:rPr sz="2100" b="0">
                 <a:solidFill>
                   <a:srgbClr val="1C1C1A"/>
                 </a:solidFill>
@@ -3420,50 +3420,34 @@
             </a:r>
           </a:p>
           <a:p>
-            <a:pPr algn="l"/>
-            <a:r>
-              <a:rPr b="0" sz="2100">
+            <a:pPr>
+              <a:spcAft>
+                <a:spcPts val="1000"/>
+              </a:spcAft>
+            </a:pPr>
+            <a:r>
+              <a:rPr sz="2100" b="0">
                 <a:solidFill>
                   <a:srgbClr val="1C1C1A"/>
                 </a:solidFill>
                 <a:latin typeface="Calibri"/>
               </a:rPr>
-              <a:t> </a:t>
-            </a:r>
-          </a:p>
-          <a:p>
-            <a:pPr algn="l"/>
-            <a:r>
-              <a:rPr b="0" sz="2100">
+              <a:t>The orders above Rs 2,000 came to 13 orders, totalling Rs 35,020.</a:t>
+            </a:r>
+          </a:p>
+          <a:p>
+            <a:pPr>
+              <a:spcAft>
+                <a:spcPts val="1000"/>
+              </a:spcAft>
+            </a:pPr>
+            <a:r>
+              <a:rPr sz="2100" b="0">
                 <a:solidFill>
                   <a:srgbClr val="1C1C1A"/>
                 </a:solidFill>
                 <a:latin typeface="Calibri"/>
               </a:rPr>
-              <a:t>The orders above Rs 2,000 came to 13 orders, totalling Rs 35,020.</a:t>
-            </a:r>
-          </a:p>
-          <a:p>
-            <a:pPr algn="l"/>
-            <a:r>
-              <a:rPr b="0" sz="2100">
-                <a:solidFill>
-                  <a:srgbClr val="1C1C1A"/>
-                </a:solidFill>
-                <a:latin typeface="Calibri"/>
-              </a:rPr>
-              <a:t> </a:t>
-            </a:r>
-          </a:p>
-          <a:p>
-            <a:pPr algn="l"/>
-            <a:r>
-              <a:rPr b="0" sz="2100">
-                <a:solidFill>
-                  <a:srgbClr val="1C1C1A"/>
-                </a:solidFill>
-                <a:latin typeface="Calibri"/>
-              </a:rPr>
               <a:t>Those are two different groups of orders that happen to hold the same count. Whenever you report either number, name the group it came from.</a:t>
             </a:r>
           </a:p>
@@ -3477,7 +3461,7 @@
         </p:nvSpPr>
         <p:spPr>
           <a:xfrm>
-            <a:off x="777240" y="6263640"/>
+            <a:off x="777240" y="6309360"/>
             <a:ext cx="10607040" cy="365760"/>
           </a:xfrm>
           <a:prstGeom prst="rect">
@@ -3486,13 +3470,13 @@
           <a:noFill/>
         </p:spPr>
         <p:txBody>
-          <a:bodyPr wrap="square">
-            <a:spAutoFit/>
-          </a:bodyPr>
-          <a:lstStyle/>
-          <a:p>
-            <a:r>
-              <a:rPr sz="1000" b="0">
+          <a:bodyPr wrap="none">
+            <a:spAutoFit/>
+          </a:bodyPr>
+          <a:lstStyle/>
+          <a:p>
+            <a:r>
+              <a:rPr sz="1000">
                 <a:solidFill>
                   <a:srgbClr val="5F6360"/>
                 </a:solidFill>
@@ -3608,7 +3592,7 @@
         <p:spPr>
           <a:xfrm>
             <a:off x="777240" y="1965960"/>
-            <a:ext cx="10607040" cy="4206240"/>
+            <a:ext cx="10607040" cy="1657350"/>
           </a:xfrm>
           <a:prstGeom prst="rect">
             <a:avLst/>
@@ -3621,9 +3605,13 @@
           </a:bodyPr>
           <a:lstStyle/>
           <a:p>
-            <a:pPr algn="l"/>
-            <a:r>
-              <a:rPr b="0" sz="2100">
+            <a:pPr>
+              <a:spcAft>
+                <a:spcPts val="1000"/>
+              </a:spcAft>
+            </a:pPr>
+            <a:r>
+              <a:rPr sz="2100" b="0">
                 <a:solidFill>
                   <a:srgbClr val="1C1C1A"/>
                 </a:solidFill>
@@ -3633,9 +3621,13 @@
             </a:r>
           </a:p>
           <a:p>
-            <a:pPr algn="l"/>
-            <a:r>
-              <a:rPr b="0" sz="2100">
+            <a:pPr>
+              <a:spcAft>
+                <a:spcPts val="1000"/>
+              </a:spcAft>
+            </a:pPr>
+            <a:r>
+              <a:rPr sz="2100" b="0">
                 <a:solidFill>
                   <a:srgbClr val="1C1C1A"/>
                 </a:solidFill>
@@ -3645,9 +3637,13 @@
             </a:r>
           </a:p>
           <a:p>
-            <a:pPr algn="l"/>
-            <a:r>
-              <a:rPr b="0" sz="2100">
+            <a:pPr>
+              <a:spcAft>
+                <a:spcPts val="1000"/>
+              </a:spcAft>
+            </a:pPr>
+            <a:r>
+              <a:rPr sz="2100" b="0">
                 <a:solidFill>
                   <a:srgbClr val="1C1C1A"/>
                 </a:solidFill>
@@ -3657,9 +3653,13 @@
             </a:r>
           </a:p>
           <a:p>
-            <a:pPr algn="l"/>
-            <a:r>
-              <a:rPr b="0" sz="2100">
+            <a:pPr>
+              <a:spcAft>
+                <a:spcPts val="1000"/>
+              </a:spcAft>
+            </a:pPr>
+            <a:r>
+              <a:rPr sz="2100" b="0">
                 <a:solidFill>
                   <a:srgbClr val="1C1C1A"/>
                 </a:solidFill>
@@ -3678,7 +3678,7 @@
         </p:nvSpPr>
         <p:spPr>
           <a:xfrm>
-            <a:off x="777240" y="6263640"/>
+            <a:off x="777240" y="6309360"/>
             <a:ext cx="10607040" cy="365760"/>
           </a:xfrm>
           <a:prstGeom prst="rect">
@@ -3687,13 +3687,13 @@
           <a:noFill/>
         </p:spPr>
         <p:txBody>
-          <a:bodyPr wrap="square">
-            <a:spAutoFit/>
-          </a:bodyPr>
-          <a:lstStyle/>
-          <a:p>
-            <a:r>
-              <a:rPr sz="1000" b="0">
+          <a:bodyPr wrap="none">
+            <a:spAutoFit/>
+          </a:bodyPr>
+          <a:lstStyle/>
+          <a:p>
+            <a:r>
+              <a:rPr sz="1000">
                 <a:solidFill>
                   <a:srgbClr val="5F6360"/>
                 </a:solidFill>
@@ -3788,6 +3788,7 @@
           </a:bodyPr>
           <a:lstStyle/>
           <a:p>
+            <a:pPr algn="ctr"/>
             <a:r>
               <a:rPr sz="3600" b="1">
                 <a:solidFill>
@@ -3809,7 +3810,7 @@
         <p:spPr>
           <a:xfrm>
             <a:off x="777240" y="1965960"/>
-            <a:ext cx="10607040" cy="4206240"/>
+            <a:ext cx="10607040" cy="790575"/>
           </a:xfrm>
           <a:prstGeom prst="rect">
             <a:avLst/>
@@ -3822,31 +3823,35 @@
           </a:bodyPr>
           <a:lstStyle/>
           <a:p>
-            <a:pPr algn="l"/>
-            <a:r>
-              <a:rPr b="0" sz="1800">
+            <a:pPr algn="ctr">
+              <a:spcAft>
+                <a:spcPts val="1000"/>
+              </a:spcAft>
+            </a:pPr>
+            <a:r>
+              <a:rPr sz="2100" b="0">
                 <a:solidFill>
                   <a:srgbClr val="FFFFFF"/>
                 </a:solidFill>
-                <a:latin typeface="Consolas"/>
+                <a:latin typeface="Calibri"/>
               </a:rPr>
               <a:t>[open the workbench] &gt; [the kernel remembers] &gt; [type decides] &gt; </a:t>
             </a:r>
             <a:r>
-              <a:rPr b="1" sz="1800">
+              <a:rPr sz="2100" b="1">
                 <a:solidFill>
                   <a:srgbClr val="FFFFFF"/>
                 </a:solidFill>
-                <a:latin typeface="Consolas"/>
+                <a:latin typeface="Calibri"/>
               </a:rPr>
               <a:t>[walk the records]</a:t>
             </a:r>
             <a:r>
-              <a:rPr b="0" sz="1800">
+              <a:rPr sz="2100" b="0">
                 <a:solidFill>
                   <a:srgbClr val="FFFFFF"/>
                 </a:solidFill>
-                <a:latin typeface="Consolas"/>
+                <a:latin typeface="Calibri"/>
               </a:rPr>
               <a:t> &gt; [the business answer]</a:t>
             </a:r>
@@ -3861,7 +3866,7 @@
         </p:nvSpPr>
         <p:spPr>
           <a:xfrm>
-            <a:off x="777240" y="6263640"/>
+            <a:off x="777240" y="6309360"/>
             <a:ext cx="10607040" cy="365760"/>
           </a:xfrm>
           <a:prstGeom prst="rect">
@@ -3870,13 +3875,13 @@
           <a:noFill/>
         </p:spPr>
         <p:txBody>
-          <a:bodyPr wrap="square">
-            <a:spAutoFit/>
-          </a:bodyPr>
-          <a:lstStyle/>
-          <a:p>
-            <a:r>
-              <a:rPr sz="1000" b="0">
+          <a:bodyPr wrap="none">
+            <a:spAutoFit/>
+          </a:bodyPr>
+          <a:lstStyle/>
+          <a:p>
+            <a:r>
+              <a:rPr sz="1000">
                 <a:solidFill>
                   <a:srgbClr val="5F6360"/>
                 </a:solidFill>
@@ -3992,7 +3997,7 @@
         <p:spPr>
           <a:xfrm>
             <a:off x="777240" y="1965960"/>
-            <a:ext cx="10607040" cy="4206240"/>
+            <a:ext cx="10607040" cy="1162050"/>
           </a:xfrm>
           <a:prstGeom prst="rect">
             <a:avLst/>
@@ -4005,9 +4010,13 @@
           </a:bodyPr>
           <a:lstStyle/>
           <a:p>
-            <a:pPr algn="l"/>
-            <a:r>
-              <a:rPr sz="1700">
+            <a:pPr>
+              <a:spcAft>
+                <a:spcPts val="400"/>
+              </a:spcAft>
+            </a:pPr>
+            <a:r>
+              <a:rPr sz="1700" b="0">
                 <a:solidFill>
                   <a:srgbClr val="2B4A7D"/>
                 </a:solidFill>
@@ -4017,62 +4026,80 @@
             </a:r>
           </a:p>
           <a:p>
-            <a:pPr algn="l"/>
-            <a:r>
-              <a:rPr sz="1700">
+            <a:pPr>
+              <a:spcAft>
+                <a:spcPts val="400"/>
+              </a:spcAft>
+            </a:pPr>
+          </a:p>
+          <a:p>
+            <a:pPr>
+              <a:spcAft>
+                <a:spcPts val="400"/>
+              </a:spcAft>
+            </a:pPr>
+            <a:r>
+              <a:rPr sz="1700" b="0">
                 <a:solidFill>
                   <a:srgbClr val="2B4A7D"/>
                 </a:solidFill>
                 <a:latin typeface="Consolas"/>
               </a:rPr>
-              <a:t> </a:t>
-            </a:r>
-          </a:p>
-          <a:p>
-            <a:pPr algn="l"/>
-            <a:r>
-              <a:rPr sz="1700">
+              <a:t>ids[0]      "KR4200"</a:t>
+            </a:r>
+          </a:p>
+          <a:p>
+            <a:pPr>
+              <a:spcAft>
+                <a:spcPts val="400"/>
+              </a:spcAft>
+            </a:pPr>
+            <a:r>
+              <a:rPr sz="1700" b="0">
                 <a:solidFill>
                   <a:srgbClr val="2B4A7D"/>
                 </a:solidFill>
                 <a:latin typeface="Consolas"/>
               </a:rPr>
-              <a:t>ids[0]      "KR4200"</a:t>
-            </a:r>
-          </a:p>
-          <a:p>
-            <a:pPr algn="l"/>
-            <a:r>
-              <a:rPr sz="1700">
-                <a:solidFill>
-                  <a:srgbClr val="2B4A7D"/>
-                </a:solidFill>
-                <a:latin typeface="Consolas"/>
-              </a:rPr>
               <a:t>ids[2]      "KR4202"</a:t>
             </a:r>
           </a:p>
-          <a:p>
-            <a:pPr algn="l"/>
-            <a:r>
-              <a:rPr b="0" sz="2100">
+        </p:txBody>
+      </p:sp>
+      <p:sp>
+        <p:nvSpPr>
+          <p:cNvPr id="5" name="TextBox 4"/>
+          <p:cNvSpPr txBox="1"/>
+          <p:nvPr/>
+        </p:nvSpPr>
+        <p:spPr>
+          <a:xfrm>
+            <a:off x="777240" y="3265169"/>
+            <a:ext cx="10607040" cy="542925"/>
+          </a:xfrm>
+          <a:prstGeom prst="rect">
+            <a:avLst/>
+          </a:prstGeom>
+          <a:noFill/>
+        </p:spPr>
+        <p:txBody>
+          <a:bodyPr wrap="square">
+            <a:spAutoFit/>
+          </a:bodyPr>
+          <a:lstStyle/>
+          <a:p>
+            <a:pPr>
+              <a:spcAft>
+                <a:spcPts val="1000"/>
+              </a:spcAft>
+            </a:pPr>
+            <a:r>
+              <a:rPr sz="2100" b="0">
                 <a:solidFill>
                   <a:srgbClr val="1C1C1A"/>
                 </a:solidFill>
                 <a:latin typeface="Calibri"/>
               </a:rPr>
-              <a:t> </a:t>
-            </a:r>
-          </a:p>
-          <a:p>
-            <a:pPr algn="l"/>
-            <a:r>
-              <a:rPr b="0" sz="2100">
-                <a:solidFill>
-                  <a:srgbClr val="1C1C1A"/>
-                </a:solidFill>
-                <a:latin typeface="Calibri"/>
-              </a:rPr>
               <a:t>Counting starts at zero, so the first item is item zero and the third item is item two.</a:t>
             </a:r>
           </a:p>
@@ -4080,13 +4107,13 @@
       </p:sp>
       <p:sp>
         <p:nvSpPr>
-          <p:cNvPr id="5" name="TextBox 4"/>
-          <p:cNvSpPr txBox="1"/>
-          <p:nvPr/>
-        </p:nvSpPr>
-        <p:spPr>
-          <a:xfrm>
-            <a:off x="777240" y="6263640"/>
+          <p:cNvPr id="6" name="TextBox 5"/>
+          <p:cNvSpPr txBox="1"/>
+          <p:nvPr/>
+        </p:nvSpPr>
+        <p:spPr>
+          <a:xfrm>
+            <a:off x="777240" y="6309360"/>
             <a:ext cx="10607040" cy="365760"/>
           </a:xfrm>
           <a:prstGeom prst="rect">
@@ -4095,13 +4122,13 @@
           <a:noFill/>
         </p:spPr>
         <p:txBody>
-          <a:bodyPr wrap="square">
-            <a:spAutoFit/>
-          </a:bodyPr>
-          <a:lstStyle/>
-          <a:p>
-            <a:r>
-              <a:rPr sz="1000" b="0">
+          <a:bodyPr wrap="none">
+            <a:spAutoFit/>
+          </a:bodyPr>
+          <a:lstStyle/>
+          <a:p>
+            <a:r>
+              <a:rPr sz="1000">
                 <a:solidFill>
                   <a:srgbClr val="5F6360"/>
                 </a:solidFill>
@@ -4217,7 +4244,7 @@
         <p:spPr>
           <a:xfrm>
             <a:off x="777240" y="1965960"/>
-            <a:ext cx="10607040" cy="4206240"/>
+            <a:ext cx="10607040" cy="914400"/>
           </a:xfrm>
           <a:prstGeom prst="rect">
             <a:avLst/>
@@ -4230,9 +4257,13 @@
           </a:bodyPr>
           <a:lstStyle/>
           <a:p>
-            <a:pPr algn="l"/>
-            <a:r>
-              <a:rPr sz="1700">
+            <a:pPr>
+              <a:spcAft>
+                <a:spcPts val="400"/>
+              </a:spcAft>
+            </a:pPr>
+            <a:r>
+              <a:rPr sz="1700" b="0">
                 <a:solidFill>
                   <a:srgbClr val="2B4A7D"/>
                 </a:solidFill>
@@ -4242,9 +4273,13 @@
             </a:r>
           </a:p>
           <a:p>
-            <a:pPr algn="l"/>
-            <a:r>
-              <a:rPr sz="1700">
+            <a:pPr>
+              <a:spcAft>
+                <a:spcPts val="400"/>
+              </a:spcAft>
+            </a:pPr>
+            <a:r>
+              <a:rPr sz="1700" b="0">
                 <a:solidFill>
                   <a:srgbClr val="2B4A7D"/>
                 </a:solidFill>
@@ -4254,9 +4289,13 @@
             </a:r>
           </a:p>
           <a:p>
-            <a:pPr algn="l"/>
-            <a:r>
-              <a:rPr sz="1700">
+            <a:pPr>
+              <a:spcAft>
+                <a:spcPts val="400"/>
+              </a:spcAft>
+            </a:pPr>
+            <a:r>
+              <a:rPr sz="1700" b="0">
                 <a:solidFill>
                   <a:srgbClr val="2B4A7D"/>
                 </a:solidFill>
@@ -4265,74 +4304,72 @@
               <a:t>len(ids)                6</a:t>
             </a:r>
           </a:p>
-          <a:p>
-            <a:pPr algn="l"/>
-            <a:r>
-              <a:rPr b="0" sz="2100">
+        </p:txBody>
+      </p:sp>
+      <p:sp>
+        <p:nvSpPr>
+          <p:cNvPr id="5" name="TextBox 4"/>
+          <p:cNvSpPr txBox="1"/>
+          <p:nvPr/>
+        </p:nvSpPr>
+        <p:spPr>
+          <a:xfrm>
+            <a:off x="777240" y="3017520"/>
+            <a:ext cx="10607040" cy="914400"/>
+          </a:xfrm>
+          <a:prstGeom prst="rect">
+            <a:avLst/>
+          </a:prstGeom>
+          <a:noFill/>
+        </p:spPr>
+        <p:txBody>
+          <a:bodyPr wrap="square">
+            <a:spAutoFit/>
+          </a:bodyPr>
+          <a:lstStyle/>
+          <a:p>
+            <a:pPr>
+              <a:spcAft>
+                <a:spcPts val="1000"/>
+              </a:spcAft>
+            </a:pPr>
+            <a:r>
+              <a:rPr sz="2100" b="0">
                 <a:solidFill>
                   <a:srgbClr val="1C1C1A"/>
                 </a:solidFill>
                 <a:latin typeface="Calibri"/>
               </a:rPr>
-              <a:t> </a:t>
-            </a:r>
-          </a:p>
-          <a:p>
-            <a:pPr algn="l"/>
-            <a:r>
-              <a:rPr b="0" sz="2100">
+              <a:t>A slice takes a run of items, starting at the first number and stopping before the second one.</a:t>
+            </a:r>
+          </a:p>
+          <a:p>
+            <a:pPr>
+              <a:spcAft>
+                <a:spcPts val="1000"/>
+              </a:spcAft>
+            </a:pPr>
+            <a:r>
+              <a:rPr sz="2100" b="0">
                 <a:solidFill>
                   <a:srgbClr val="1C1C1A"/>
                 </a:solidFill>
                 <a:latin typeface="Calibri"/>
               </a:rPr>
-              <a:t>A slice takes a run of items, starting at the first number and stopping before the second one.</a:t>
-            </a:r>
-          </a:p>
-          <a:p>
-            <a:pPr algn="l"/>
-            <a:r>
-              <a:rPr b="0" sz="2100">
-                <a:solidFill>
-                  <a:srgbClr val="1C1C1A"/>
-                </a:solidFill>
-                <a:latin typeface="Calibri"/>
-              </a:rPr>
-              <a:t> </a:t>
-            </a:r>
-          </a:p>
-          <a:p>
-            <a:pPr algn="l"/>
-            <a:r>
-              <a:rPr b="0" sz="1800">
-                <a:solidFill>
-                  <a:srgbClr val="2B4A7D"/>
-                </a:solidFill>
-                <a:latin typeface="Consolas"/>
-              </a:rPr>
-              <a:t>append</a:t>
-            </a:r>
-            <a:r>
-              <a:rPr b="0" sz="2100">
-                <a:solidFill>
-                  <a:srgbClr val="1C1C1A"/>
-                </a:solidFill>
-                <a:latin typeface="Calibri"/>
-              </a:rPr>
-              <a:t> puts one more item on the end of the list you already have.</a:t>
-            </a:r>
-          </a:p>
-        </p:txBody>
-      </p:sp>
-      <p:sp>
-        <p:nvSpPr>
-          <p:cNvPr id="5" name="TextBox 4"/>
-          <p:cNvSpPr txBox="1"/>
-          <p:nvPr/>
-        </p:nvSpPr>
-        <p:spPr>
-          <a:xfrm>
-            <a:off x="777240" y="6263640"/>
+              <a:t>append puts one more item on the end of the list you already have.</a:t>
+            </a:r>
+          </a:p>
+        </p:txBody>
+      </p:sp>
+      <p:sp>
+        <p:nvSpPr>
+          <p:cNvPr id="6" name="TextBox 5"/>
+          <p:cNvSpPr txBox="1"/>
+          <p:nvPr/>
+        </p:nvSpPr>
+        <p:spPr>
+          <a:xfrm>
+            <a:off x="777240" y="6309360"/>
             <a:ext cx="10607040" cy="365760"/>
           </a:xfrm>
           <a:prstGeom prst="rect">
@@ -4341,13 +4378,13 @@
           <a:noFill/>
         </p:spPr>
         <p:txBody>
-          <a:bodyPr wrap="square">
-            <a:spAutoFit/>
-          </a:bodyPr>
-          <a:lstStyle/>
-          <a:p>
-            <a:r>
-              <a:rPr sz="1000" b="0">
+          <a:bodyPr wrap="none">
+            <a:spAutoFit/>
+          </a:bodyPr>
+          <a:lstStyle/>
+          <a:p>
+            <a:r>
+              <a:rPr sz="1000">
                 <a:solidFill>
                   <a:srgbClr val="5F6360"/>
                 </a:solidFill>
@@ -4463,7 +4500,7 @@
         <p:spPr>
           <a:xfrm>
             <a:off x="777240" y="1965960"/>
-            <a:ext cx="10607040" cy="4206240"/>
+            <a:ext cx="10607040" cy="1409700"/>
           </a:xfrm>
           <a:prstGeom prst="rect">
             <a:avLst/>
@@ -4476,9 +4513,13 @@
           </a:bodyPr>
           <a:lstStyle/>
           <a:p>
-            <a:pPr algn="l"/>
-            <a:r>
-              <a:rPr sz="1700">
+            <a:pPr>
+              <a:spcAft>
+                <a:spcPts val="400"/>
+              </a:spcAft>
+            </a:pPr>
+            <a:r>
+              <a:rPr sz="1700" b="0">
                 <a:solidFill>
                   <a:srgbClr val="2B4A7D"/>
                 </a:solidFill>
@@ -4488,9 +4529,13 @@
             </a:r>
           </a:p>
           <a:p>
-            <a:pPr algn="l"/>
-            <a:r>
-              <a:rPr sz="1700">
+            <a:pPr>
+              <a:spcAft>
+                <a:spcPts val="400"/>
+              </a:spcAft>
+            </a:pPr>
+            <a:r>
+              <a:rPr sz="1700" b="0">
                 <a:solidFill>
                   <a:srgbClr val="2B4A7D"/>
                 </a:solidFill>
@@ -4500,9 +4545,13 @@
             </a:r>
           </a:p>
           <a:p>
-            <a:pPr algn="l"/>
-            <a:r>
-              <a:rPr sz="1700">
+            <a:pPr>
+              <a:spcAft>
+                <a:spcPts val="400"/>
+              </a:spcAft>
+            </a:pPr>
+            <a:r>
+              <a:rPr sz="1700" b="0">
                 <a:solidFill>
                   <a:srgbClr val="2B4A7D"/>
                 </a:solidFill>
@@ -4512,107 +4561,119 @@
             </a:r>
           </a:p>
           <a:p>
-            <a:pPr algn="l"/>
-            <a:r>
-              <a:rPr sz="1700">
+            <a:pPr>
+              <a:spcAft>
+                <a:spcPts val="400"/>
+              </a:spcAft>
+            </a:pPr>
+          </a:p>
+          <a:p>
+            <a:pPr>
+              <a:spcAft>
+                <a:spcPts val="400"/>
+              </a:spcAft>
+            </a:pPr>
+            <a:r>
+              <a:rPr sz="1700" b="0">
                 <a:solidFill>
                   <a:srgbClr val="2B4A7D"/>
                 </a:solidFill>
                 <a:latin typeface="Consolas"/>
               </a:rPr>
-              <a:t> </a:t>
-            </a:r>
-          </a:p>
-          <a:p>
-            <a:pPr algn="l"/>
-            <a:r>
-              <a:rPr sz="1700">
+              <a:t>len(a)      3</a:t>
+            </a:r>
+          </a:p>
+        </p:txBody>
+      </p:sp>
+      <p:sp>
+        <p:nvSpPr>
+          <p:cNvPr id="5" name="TextBox 4"/>
+          <p:cNvSpPr txBox="1"/>
+          <p:nvPr/>
+        </p:nvSpPr>
+        <p:spPr>
+          <a:xfrm>
+            <a:off x="777240" y="3512820"/>
+            <a:ext cx="10607040" cy="1162050"/>
+          </a:xfrm>
+          <a:prstGeom prst="rect">
+            <a:avLst/>
+          </a:prstGeom>
+          <a:noFill/>
+        </p:spPr>
+        <p:txBody>
+          <a:bodyPr wrap="square">
+            <a:spAutoFit/>
+          </a:bodyPr>
+          <a:lstStyle/>
+          <a:p>
+            <a:pPr>
+              <a:spcAft>
+                <a:spcPts val="1000"/>
+              </a:spcAft>
+            </a:pPr>
+            <a:r>
+              <a:rPr sz="2100" b="0">
+                <a:solidFill>
+                  <a:srgbClr val="1C1C1A"/>
+                </a:solidFill>
+                <a:latin typeface="Calibri"/>
+              </a:rPr>
+              <a:t>b = a gives the same list a second name. There is one list here and two ways to reach it, so appending through either name changes what both names show.</a:t>
+            </a:r>
+          </a:p>
+          <a:p>
+            <a:pPr>
+              <a:spcAft>
+                <a:spcPts val="1000"/>
+              </a:spcAft>
+            </a:pPr>
+            <a:r>
+              <a:rPr sz="2100" b="0">
+                <a:solidFill>
+                  <a:srgbClr val="1C1C1A"/>
+                </a:solidFill>
+                <a:latin typeface="Calibri"/>
+              </a:rPr>
+              <a:t>When you want a second list, say so on purpose:</a:t>
+            </a:r>
+          </a:p>
+        </p:txBody>
+      </p:sp>
+      <p:sp>
+        <p:nvSpPr>
+          <p:cNvPr id="6" name="TextBox 5"/>
+          <p:cNvSpPr txBox="1"/>
+          <p:nvPr/>
+        </p:nvSpPr>
+        <p:spPr>
+          <a:xfrm>
+            <a:off x="777240" y="4812030"/>
+            <a:ext cx="10607040" cy="502920"/>
+          </a:xfrm>
+          <a:prstGeom prst="rect">
+            <a:avLst/>
+          </a:prstGeom>
+          <a:noFill/>
+        </p:spPr>
+        <p:txBody>
+          <a:bodyPr wrap="square">
+            <a:spAutoFit/>
+          </a:bodyPr>
+          <a:lstStyle/>
+          <a:p>
+            <a:pPr>
+              <a:spcAft>
+                <a:spcPts val="400"/>
+              </a:spcAft>
+            </a:pPr>
+            <a:r>
+              <a:rPr sz="1700" b="0">
                 <a:solidFill>
                   <a:srgbClr val="2B4A7D"/>
                 </a:solidFill>
                 <a:latin typeface="Consolas"/>
               </a:rPr>
-              <a:t>len(a)      3</a:t>
-            </a:r>
-          </a:p>
-          <a:p>
-            <a:pPr algn="l"/>
-            <a:r>
-              <a:rPr b="0" sz="2100">
-                <a:solidFill>
-                  <a:srgbClr val="1C1C1A"/>
-                </a:solidFill>
-                <a:latin typeface="Calibri"/>
-              </a:rPr>
-              <a:t> </a:t>
-            </a:r>
-          </a:p>
-          <a:p>
-            <a:pPr algn="l"/>
-            <a:r>
-              <a:rPr b="0" sz="1800">
-                <a:solidFill>
-                  <a:srgbClr val="2B4A7D"/>
-                </a:solidFill>
-                <a:latin typeface="Consolas"/>
-              </a:rPr>
-              <a:t>b = a</a:t>
-            </a:r>
-            <a:r>
-              <a:rPr b="0" sz="2100">
-                <a:solidFill>
-                  <a:srgbClr val="1C1C1A"/>
-                </a:solidFill>
-                <a:latin typeface="Calibri"/>
-              </a:rPr>
-              <a:t> gives the same list a second name. There is one list here and two ways to reach it, so appending through either name changes what both names show.</a:t>
-            </a:r>
-          </a:p>
-          <a:p>
-            <a:pPr algn="l"/>
-            <a:r>
-              <a:rPr b="0" sz="2100">
-                <a:solidFill>
-                  <a:srgbClr val="1C1C1A"/>
-                </a:solidFill>
-                <a:latin typeface="Calibri"/>
-              </a:rPr>
-              <a:t> </a:t>
-            </a:r>
-          </a:p>
-          <a:p>
-            <a:pPr algn="l"/>
-            <a:r>
-              <a:rPr b="0" sz="2100">
-                <a:solidFill>
-                  <a:srgbClr val="1C1C1A"/>
-                </a:solidFill>
-                <a:latin typeface="Calibri"/>
-              </a:rPr>
-              <a:t>When you want a second list, say so on purpose:</a:t>
-            </a:r>
-          </a:p>
-          <a:p>
-            <a:pPr algn="l"/>
-            <a:r>
-              <a:rPr b="0" sz="2100">
-                <a:solidFill>
-                  <a:srgbClr val="1C1C1A"/>
-                </a:solidFill>
-                <a:latin typeface="Calibri"/>
-              </a:rPr>
-              <a:t> </a:t>
-            </a:r>
-          </a:p>
-          <a:p>
-            <a:pPr algn="l"/>
-            <a:r>
-              <a:rPr sz="1700">
-                <a:solidFill>
-                  <a:srgbClr val="2B4A7D"/>
-                </a:solidFill>
-                <a:latin typeface="Consolas"/>
-              </a:rPr>
               <a:t>b = list(a)</a:t>
             </a:r>
           </a:p>
@@ -4620,13 +4681,13 @@
       </p:sp>
       <p:sp>
         <p:nvSpPr>
-          <p:cNvPr id="5" name="TextBox 4"/>
-          <p:cNvSpPr txBox="1"/>
-          <p:nvPr/>
-        </p:nvSpPr>
-        <p:spPr>
-          <a:xfrm>
-            <a:off x="777240" y="6263640"/>
+          <p:cNvPr id="7" name="TextBox 6"/>
+          <p:cNvSpPr txBox="1"/>
+          <p:nvPr/>
+        </p:nvSpPr>
+        <p:spPr>
+          <a:xfrm>
+            <a:off x="777240" y="6309360"/>
             <a:ext cx="10607040" cy="365760"/>
           </a:xfrm>
           <a:prstGeom prst="rect">
@@ -4635,13 +4696,13 @@
           <a:noFill/>
         </p:spPr>
         <p:txBody>
-          <a:bodyPr wrap="square">
-            <a:spAutoFit/>
-          </a:bodyPr>
-          <a:lstStyle/>
-          <a:p>
-            <a:r>
-              <a:rPr sz="1000" b="0">
+          <a:bodyPr wrap="none">
+            <a:spAutoFit/>
+          </a:bodyPr>
+          <a:lstStyle/>
+          <a:p>
+            <a:r>
+              <a:rPr sz="1000">
                 <a:solidFill>
                   <a:srgbClr val="5F6360"/>
                 </a:solidFill>
@@ -4757,7 +4818,7 @@
         <p:spPr>
           <a:xfrm>
             <a:off x="777240" y="1965960"/>
-            <a:ext cx="10607040" cy="4206240"/>
+            <a:ext cx="10607040" cy="1657350"/>
           </a:xfrm>
           <a:prstGeom prst="rect">
             <a:avLst/>
@@ -4770,9 +4831,13 @@
           </a:bodyPr>
           <a:lstStyle/>
           <a:p>
-            <a:pPr algn="l"/>
-            <a:r>
-              <a:rPr b="0" sz="2100">
+            <a:pPr>
+              <a:spcAft>
+                <a:spcPts val="1000"/>
+              </a:spcAft>
+            </a:pPr>
+            <a:r>
+              <a:rPr sz="2100" b="0">
                 <a:solidFill>
                   <a:srgbClr val="1C1C1A"/>
                 </a:solidFill>
@@ -4782,9 +4847,13 @@
             </a:r>
           </a:p>
           <a:p>
-            <a:pPr algn="l"/>
-            <a:r>
-              <a:rPr b="0" sz="2100">
+            <a:pPr>
+              <a:spcAft>
+                <a:spcPts val="1000"/>
+              </a:spcAft>
+            </a:pPr>
+            <a:r>
+              <a:rPr sz="2100" b="0">
                 <a:solidFill>
                   <a:srgbClr val="1C1C1A"/>
                 </a:solidFill>
@@ -4794,63 +4863,35 @@
             </a:r>
           </a:p>
           <a:p>
-            <a:pPr algn="l"/>
-            <a:r>
-              <a:rPr b="0" sz="2100">
+            <a:pPr>
+              <a:spcAft>
+                <a:spcPts val="1000"/>
+              </a:spcAft>
+            </a:pPr>
+            <a:r>
+              <a:rPr sz="2100" b="0">
                 <a:solidFill>
                   <a:srgbClr val="1C1C1A"/>
                 </a:solidFill>
                 <a:latin typeface="Calibri"/>
               </a:rPr>
-              <a:t>3. </a:t>
-            </a:r>
-            <a:r>
-              <a:rPr b="0" sz="1800">
-                <a:solidFill>
-                  <a:srgbClr val="2B4A7D"/>
-                </a:solidFill>
-                <a:latin typeface="Consolas"/>
-              </a:rPr>
-              <a:t>append</a:t>
-            </a:r>
-            <a:r>
-              <a:rPr b="0" sz="2100">
+              <a:t>3. append changes the list in place.</a:t>
+            </a:r>
+          </a:p>
+          <a:p>
+            <a:pPr>
+              <a:spcAft>
+                <a:spcPts val="1000"/>
+              </a:spcAft>
+            </a:pPr>
+            <a:r>
+              <a:rPr sz="2100" b="0">
                 <a:solidFill>
                   <a:srgbClr val="1C1C1A"/>
                 </a:solidFill>
                 <a:latin typeface="Calibri"/>
               </a:rPr>
-              <a:t> changes the list in place.</a:t>
-            </a:r>
-          </a:p>
-          <a:p>
-            <a:pPr algn="l"/>
-            <a:r>
-              <a:rPr b="0" sz="2100">
-                <a:solidFill>
-                  <a:srgbClr val="1C1C1A"/>
-                </a:solidFill>
-                <a:latin typeface="Calibri"/>
-              </a:rPr>
-              <a:t>4. Copy with </a:t>
-            </a:r>
-            <a:r>
-              <a:rPr b="0" sz="1800">
-                <a:solidFill>
-                  <a:srgbClr val="2B4A7D"/>
-                </a:solidFill>
-                <a:latin typeface="Consolas"/>
-              </a:rPr>
-              <a:t>list(a)</a:t>
-            </a:r>
-            <a:r>
-              <a:rPr b="0" sz="2100">
-                <a:solidFill>
-                  <a:srgbClr val="1C1C1A"/>
-                </a:solidFill>
-                <a:latin typeface="Calibri"/>
-              </a:rPr>
-              <a:t> when you want two lists instead of two names.</a:t>
+              <a:t>4. Copy with list(a) when you want two lists instead of two names.</a:t>
             </a:r>
           </a:p>
         </p:txBody>
@@ -4863,7 +4904,7 @@
         </p:nvSpPr>
         <p:spPr>
           <a:xfrm>
-            <a:off x="777240" y="6263640"/>
+            <a:off x="777240" y="6309360"/>
             <a:ext cx="10607040" cy="365760"/>
           </a:xfrm>
           <a:prstGeom prst="rect">
@@ -4872,13 +4913,13 @@
           <a:noFill/>
         </p:spPr>
         <p:txBody>
-          <a:bodyPr wrap="square">
-            <a:spAutoFit/>
-          </a:bodyPr>
-          <a:lstStyle/>
-          <a:p>
-            <a:r>
-              <a:rPr sz="1000" b="0">
+          <a:bodyPr wrap="none">
+            <a:spAutoFit/>
+          </a:bodyPr>
+          <a:lstStyle/>
+          <a:p>
+            <a:r>
+              <a:rPr sz="1000">
                 <a:solidFill>
                   <a:srgbClr val="5F6360"/>
                 </a:solidFill>
@@ -4973,6 +5014,7 @@
           </a:bodyPr>
           <a:lstStyle/>
           <a:p>
+            <a:pPr algn="ctr"/>
             <a:r>
               <a:rPr sz="3600" b="1">
                 <a:solidFill>
@@ -4994,7 +5036,7 @@
         <p:spPr>
           <a:xfrm>
             <a:off x="777240" y="1965960"/>
-            <a:ext cx="10607040" cy="4206240"/>
+            <a:ext cx="10607040" cy="790575"/>
           </a:xfrm>
           <a:prstGeom prst="rect">
             <a:avLst/>
@@ -5007,31 +5049,35 @@
           </a:bodyPr>
           <a:lstStyle/>
           <a:p>
-            <a:pPr algn="l"/>
-            <a:r>
-              <a:rPr b="0" sz="1800">
+            <a:pPr algn="ctr">
+              <a:spcAft>
+                <a:spcPts val="1000"/>
+              </a:spcAft>
+            </a:pPr>
+            <a:r>
+              <a:rPr sz="2100" b="0">
                 <a:solidFill>
                   <a:srgbClr val="FFFFFF"/>
                 </a:solidFill>
-                <a:latin typeface="Consolas"/>
+                <a:latin typeface="Calibri"/>
               </a:rPr>
               <a:t>[open the workbench] &gt; [the kernel remembers] &gt; [type decides] &gt; </a:t>
             </a:r>
             <a:r>
-              <a:rPr b="1" sz="1800">
+              <a:rPr sz="2100" b="1">
                 <a:solidFill>
                   <a:srgbClr val="FFFFFF"/>
                 </a:solidFill>
-                <a:latin typeface="Consolas"/>
+                <a:latin typeface="Calibri"/>
               </a:rPr>
               <a:t>[walk the records]</a:t>
             </a:r>
             <a:r>
-              <a:rPr b="0" sz="1800">
+              <a:rPr sz="2100" b="0">
                 <a:solidFill>
                   <a:srgbClr val="FFFFFF"/>
                 </a:solidFill>
-                <a:latin typeface="Consolas"/>
+                <a:latin typeface="Calibri"/>
               </a:rPr>
               <a:t> &gt; [the business answer]</a:t>
             </a:r>
@@ -5046,7 +5092,7 @@
         </p:nvSpPr>
         <p:spPr>
           <a:xfrm>
-            <a:off x="777240" y="6263640"/>
+            <a:off x="777240" y="6309360"/>
             <a:ext cx="10607040" cy="365760"/>
           </a:xfrm>
           <a:prstGeom prst="rect">
@@ -5055,13 +5101,13 @@
           <a:noFill/>
         </p:spPr>
         <p:txBody>
-          <a:bodyPr wrap="square">
-            <a:spAutoFit/>
-          </a:bodyPr>
-          <a:lstStyle/>
-          <a:p>
-            <a:r>
-              <a:rPr sz="1000" b="0">
+          <a:bodyPr wrap="none">
+            <a:spAutoFit/>
+          </a:bodyPr>
+          <a:lstStyle/>
+          <a:p>
+            <a:r>
+              <a:rPr sz="1000">
                 <a:solidFill>
                   <a:srgbClr val="5F6360"/>
                 </a:solidFill>
@@ -5177,7 +5223,7 @@
         <p:spPr>
           <a:xfrm>
             <a:off x="777240" y="1965960"/>
-            <a:ext cx="10607040" cy="4206240"/>
+            <a:ext cx="10607040" cy="1162050"/>
           </a:xfrm>
           <a:prstGeom prst="rect">
             <a:avLst/>
@@ -5190,9 +5236,13 @@
           </a:bodyPr>
           <a:lstStyle/>
           <a:p>
-            <a:pPr algn="l"/>
-            <a:r>
-              <a:rPr sz="1700">
+            <a:pPr>
+              <a:spcAft>
+                <a:spcPts val="400"/>
+              </a:spcAft>
+            </a:pPr>
+            <a:r>
+              <a:rPr sz="1700" b="0">
                 <a:solidFill>
                   <a:srgbClr val="2B4A7D"/>
                 </a:solidFill>
@@ -5202,9 +5252,13 @@
             </a:r>
           </a:p>
           <a:p>
-            <a:pPr algn="l"/>
-            <a:r>
-              <a:rPr sz="1700">
+            <a:pPr>
+              <a:spcAft>
+                <a:spcPts val="400"/>
+              </a:spcAft>
+            </a:pPr>
+            <a:r>
+              <a:rPr sz="1700" b="0">
                 <a:solidFill>
                   <a:srgbClr val="2B4A7D"/>
                 </a:solidFill>
@@ -5214,50 +5268,64 @@
             </a:r>
           </a:p>
           <a:p>
-            <a:pPr algn="l"/>
-            <a:r>
-              <a:rPr sz="1700">
+            <a:pPr>
+              <a:spcAft>
+                <a:spcPts val="400"/>
+              </a:spcAft>
+            </a:pPr>
+          </a:p>
+          <a:p>
+            <a:pPr>
+              <a:spcAft>
+                <a:spcPts val="400"/>
+              </a:spcAft>
+            </a:pPr>
+            <a:r>
+              <a:rPr sz="1700" b="0">
                 <a:solidFill>
                   <a:srgbClr val="2B4A7D"/>
                 </a:solidFill>
                 <a:latin typeface="Consolas"/>
               </a:rPr>
-              <a:t> </a:t>
-            </a:r>
-          </a:p>
-          <a:p>
-            <a:pPr algn="l"/>
-            <a:r>
-              <a:rPr sz="1700">
-                <a:solidFill>
-                  <a:srgbClr val="2B4A7D"/>
-                </a:solidFill>
-                <a:latin typeface="Consolas"/>
-              </a:rPr>
               <a:t>r["status"]     "delivered"</a:t>
             </a:r>
           </a:p>
-          <a:p>
-            <a:pPr algn="l"/>
-            <a:r>
-              <a:rPr b="0" sz="2100">
+        </p:txBody>
+      </p:sp>
+      <p:sp>
+        <p:nvSpPr>
+          <p:cNvPr id="5" name="TextBox 4"/>
+          <p:cNvSpPr txBox="1"/>
+          <p:nvPr/>
+        </p:nvSpPr>
+        <p:spPr>
+          <a:xfrm>
+            <a:off x="777240" y="3265169"/>
+            <a:ext cx="10607040" cy="790575"/>
+          </a:xfrm>
+          <a:prstGeom prst="rect">
+            <a:avLst/>
+          </a:prstGeom>
+          <a:noFill/>
+        </p:spPr>
+        <p:txBody>
+          <a:bodyPr wrap="square">
+            <a:spAutoFit/>
+          </a:bodyPr>
+          <a:lstStyle/>
+          <a:p>
+            <a:pPr>
+              <a:spcAft>
+                <a:spcPts val="1000"/>
+              </a:spcAft>
+            </a:pPr>
+            <a:r>
+              <a:rPr sz="2100" b="0">
                 <a:solidFill>
                   <a:srgbClr val="1C1C1A"/>
                 </a:solidFill>
                 <a:latin typeface="Calibri"/>
               </a:rPr>
-              <a:t> </a:t>
-            </a:r>
-          </a:p>
-          <a:p>
-            <a:pPr algn="l"/>
-            <a:r>
-              <a:rPr b="0" sz="2100">
-                <a:solidFill>
-                  <a:srgbClr val="1C1C1A"/>
-                </a:solidFill>
-                <a:latin typeface="Calibri"/>
-              </a:rPr>
               <a:t>A dictionary stores values under names, and you fetch a field by asking for its name. Your loop has been doing this since half one.</a:t>
             </a:r>
           </a:p>
@@ -5265,13 +5333,13 @@
       </p:sp>
       <p:sp>
         <p:nvSpPr>
-          <p:cNvPr id="5" name="TextBox 4"/>
-          <p:cNvSpPr txBox="1"/>
-          <p:nvPr/>
-        </p:nvSpPr>
-        <p:spPr>
-          <a:xfrm>
-            <a:off x="777240" y="6263640"/>
+          <p:cNvPr id="6" name="TextBox 5"/>
+          <p:cNvSpPr txBox="1"/>
+          <p:nvPr/>
+        </p:nvSpPr>
+        <p:spPr>
+          <a:xfrm>
+            <a:off x="777240" y="6309360"/>
             <a:ext cx="10607040" cy="365760"/>
           </a:xfrm>
           <a:prstGeom prst="rect">
@@ -5280,13 +5348,13 @@
           <a:noFill/>
         </p:spPr>
         <p:txBody>
-          <a:bodyPr wrap="square">
-            <a:spAutoFit/>
-          </a:bodyPr>
-          <a:lstStyle/>
-          <a:p>
-            <a:r>
-              <a:rPr sz="1000" b="0">
+          <a:bodyPr wrap="none">
+            <a:spAutoFit/>
+          </a:bodyPr>
+          <a:lstStyle/>
+          <a:p>
+            <a:r>
+              <a:rPr sz="1000">
                 <a:solidFill>
                   <a:srgbClr val="5F6360"/>
                 </a:solidFill>
@@ -5402,7 +5470,7 @@
         <p:spPr>
           <a:xfrm>
             <a:off x="777240" y="1965960"/>
-            <a:ext cx="10607040" cy="4206240"/>
+            <a:ext cx="10607040" cy="1533525"/>
           </a:xfrm>
           <a:prstGeom prst="rect">
             <a:avLst/>
@@ -5415,9 +5483,13 @@
           </a:bodyPr>
           <a:lstStyle/>
           <a:p>
-            <a:pPr algn="l"/>
-            <a:r>
-              <a:rPr b="0" sz="2100">
+            <a:pPr>
+              <a:spcAft>
+                <a:spcPts val="1000"/>
+              </a:spcAft>
+            </a:pPr>
+            <a:r>
+              <a:rPr sz="2100" b="0">
                 <a:solidFill>
                   <a:srgbClr val="1C1C1A"/>
                 </a:solidFill>
@@ -5427,50 +5499,34 @@
             </a:r>
           </a:p>
           <a:p>
-            <a:pPr algn="l"/>
-            <a:r>
-              <a:rPr b="0" sz="2100">
+            <a:pPr>
+              <a:spcAft>
+                <a:spcPts val="1000"/>
+              </a:spcAft>
+            </a:pPr>
+            <a:r>
+              <a:rPr sz="2100" b="0">
                 <a:solidFill>
                   <a:srgbClr val="1C1C1A"/>
                 </a:solidFill>
                 <a:latin typeface="Calibri"/>
               </a:rPr>
-              <a:t> </a:t>
-            </a:r>
-          </a:p>
-          <a:p>
-            <a:pPr algn="l"/>
-            <a:r>
-              <a:rPr b="0" sz="2100">
+              <a:t>The day someone adds a column in front of the status field, every position you wrote points one field to the left, and your code keeps running and answers a different question.</a:t>
+            </a:r>
+          </a:p>
+          <a:p>
+            <a:pPr>
+              <a:spcAft>
+                <a:spcPts val="1000"/>
+              </a:spcAft>
+            </a:pPr>
+            <a:r>
+              <a:rPr sz="2100" b="0">
                 <a:solidFill>
                   <a:srgbClr val="1C1C1A"/>
                 </a:solidFill>
                 <a:latin typeface="Calibri"/>
               </a:rPr>
-              <a:t>The day someone adds a column in front of the status field, every position you wrote points one field to the left, and your code keeps running and answers a different question.</a:t>
-            </a:r>
-          </a:p>
-          <a:p>
-            <a:pPr algn="l"/>
-            <a:r>
-              <a:rPr b="0" sz="2100">
-                <a:solidFill>
-                  <a:srgbClr val="1C1C1A"/>
-                </a:solidFill>
-                <a:latin typeface="Calibri"/>
-              </a:rPr>
-              <a:t> </a:t>
-            </a:r>
-          </a:p>
-          <a:p>
-            <a:pPr algn="l"/>
-            <a:r>
-              <a:rPr b="0" sz="2100">
-                <a:solidFill>
-                  <a:srgbClr val="1C1C1A"/>
-                </a:solidFill>
-                <a:latin typeface="Calibri"/>
-              </a:rPr>
               <a:t>A name survives that reordering, and that is the whole argument.</a:t>
             </a:r>
           </a:p>
@@ -5484,7 +5540,7 @@
         </p:nvSpPr>
         <p:spPr>
           <a:xfrm>
-            <a:off x="777240" y="6263640"/>
+            <a:off x="777240" y="6309360"/>
             <a:ext cx="10607040" cy="365760"/>
           </a:xfrm>
           <a:prstGeom prst="rect">
@@ -5493,13 +5549,13 @@
           <a:noFill/>
         </p:spPr>
         <p:txBody>
-          <a:bodyPr wrap="square">
-            <a:spAutoFit/>
-          </a:bodyPr>
-          <a:lstStyle/>
-          <a:p>
-            <a:r>
-              <a:rPr sz="1000" b="0">
+          <a:bodyPr wrap="none">
+            <a:spAutoFit/>
+          </a:bodyPr>
+          <a:lstStyle/>
+          <a:p>
+            <a:r>
+              <a:rPr sz="1000">
                 <a:solidFill>
                   <a:srgbClr val="5F6360"/>
                 </a:solidFill>
@@ -5615,7 +5671,7 @@
         <p:spPr>
           <a:xfrm>
             <a:off x="777240" y="1965960"/>
-            <a:ext cx="10607040" cy="4206240"/>
+            <a:ext cx="10607040" cy="1409700"/>
           </a:xfrm>
           <a:prstGeom prst="rect">
             <a:avLst/>
@@ -5628,56 +5684,52 @@
           </a:bodyPr>
           <a:lstStyle/>
           <a:p>
-            <a:pPr algn="l"/>
-            <a:r>
-              <a:rPr b="0" sz="1800">
-                <a:solidFill>
-                  <a:srgbClr val="2B4A7D"/>
-                </a:solidFill>
-                <a:latin typeface="Consolas"/>
+            <a:pPr>
+              <a:spcAft>
+                <a:spcPts val="1000"/>
+              </a:spcAft>
+            </a:pPr>
+            <a:r>
+              <a:rPr sz="2100" b="0">
+                <a:solidFill>
+                  <a:srgbClr val="1C1C1A"/>
+                </a:solidFill>
+                <a:latin typeface="Calibri"/>
               </a:rPr>
               <a:t>[open the workbench] &gt; [the kernel remembers] &gt; [type decides] &gt; </a:t>
             </a:r>
             <a:r>
-              <a:rPr b="1" sz="1800">
-                <a:solidFill>
-                  <a:srgbClr val="2B4A7D"/>
-                </a:solidFill>
-                <a:latin typeface="Consolas"/>
+              <a:rPr sz="2100" b="1">
+                <a:solidFill>
+                  <a:srgbClr val="1C1C1A"/>
+                </a:solidFill>
+                <a:latin typeface="Calibri"/>
               </a:rPr>
               <a:t>[walk the records]</a:t>
             </a:r>
             <a:r>
-              <a:rPr b="0" sz="1800">
-                <a:solidFill>
-                  <a:srgbClr val="2B4A7D"/>
-                </a:solidFill>
-                <a:latin typeface="Consolas"/>
+              <a:rPr sz="2100" b="0">
+                <a:solidFill>
+                  <a:srgbClr val="1C1C1A"/>
+                </a:solidFill>
+                <a:latin typeface="Calibri"/>
               </a:rPr>
               <a:t> &gt; [the business answer]</a:t>
             </a:r>
           </a:p>
           <a:p>
-            <a:pPr algn="l"/>
-            <a:r>
-              <a:rPr b="0" sz="2100">
+            <a:pPr>
+              <a:spcAft>
+                <a:spcPts val="1000"/>
+              </a:spcAft>
+            </a:pPr>
+            <a:r>
+              <a:rPr sz="2100" b="0">
                 <a:solidFill>
                   <a:srgbClr val="1C1C1A"/>
                 </a:solidFill>
                 <a:latin typeface="Calibri"/>
               </a:rPr>
-              <a:t> </a:t>
-            </a:r>
-          </a:p>
-          <a:p>
-            <a:pPr algn="l"/>
-            <a:r>
-              <a:rPr b="0" sz="2100">
-                <a:solidFill>
-                  <a:srgbClr val="1C1C1A"/>
-                </a:solidFill>
-                <a:latin typeface="Calibri"/>
-              </a:rPr>
               <a:t>The kernel holds your records and you can name a value's type. Now the records have to produce a number.</a:t>
             </a:r>
           </a:p>
@@ -5691,7 +5743,7 @@
         </p:nvSpPr>
         <p:spPr>
           <a:xfrm>
-            <a:off x="777240" y="6263640"/>
+            <a:off x="777240" y="6309360"/>
             <a:ext cx="10607040" cy="365760"/>
           </a:xfrm>
           <a:prstGeom prst="rect">
@@ -5700,13 +5752,13 @@
           <a:noFill/>
         </p:spPr>
         <p:txBody>
-          <a:bodyPr wrap="square">
-            <a:spAutoFit/>
-          </a:bodyPr>
-          <a:lstStyle/>
-          <a:p>
-            <a:r>
-              <a:rPr sz="1000" b="0">
+          <a:bodyPr wrap="none">
+            <a:spAutoFit/>
+          </a:bodyPr>
+          <a:lstStyle/>
+          <a:p>
+            <a:r>
+              <a:rPr sz="1000">
                 <a:solidFill>
                   <a:srgbClr val="5F6360"/>
                 </a:solidFill>
@@ -5822,7 +5874,7 @@
         <p:spPr>
           <a:xfrm>
             <a:off x="777240" y="1965960"/>
-            <a:ext cx="10607040" cy="4206240"/>
+            <a:ext cx="10607040" cy="502920"/>
           </a:xfrm>
           <a:prstGeom prst="rect">
             <a:avLst/>
@@ -5835,9 +5887,13 @@
           </a:bodyPr>
           <a:lstStyle/>
           <a:p>
-            <a:pPr algn="l"/>
-            <a:r>
-              <a:rPr sz="1700">
+            <a:pPr>
+              <a:spcAft>
+                <a:spcPts val="400"/>
+              </a:spcAft>
+            </a:pPr>
+            <a:r>
+              <a:rPr sz="1700" b="0">
                 <a:solidFill>
                   <a:srgbClr val="2B4A7D"/>
                 </a:solidFill>
@@ -5846,51 +5902,81 @@
               <a:t>records[0]["discount"]</a:t>
             </a:r>
           </a:p>
-          <a:p>
-            <a:pPr algn="l"/>
-            <a:r>
-              <a:rPr b="0" sz="2100">
+        </p:txBody>
+      </p:sp>
+      <p:sp>
+        <p:nvSpPr>
+          <p:cNvPr id="5" name="TextBox 4"/>
+          <p:cNvSpPr txBox="1"/>
+          <p:nvPr/>
+        </p:nvSpPr>
+        <p:spPr>
+          <a:xfrm>
+            <a:off x="777240" y="2606040"/>
+            <a:ext cx="10607040" cy="502920"/>
+          </a:xfrm>
+          <a:prstGeom prst="rect">
+            <a:avLst/>
+          </a:prstGeom>
+          <a:noFill/>
+        </p:spPr>
+        <p:txBody>
+          <a:bodyPr wrap="square">
+            <a:spAutoFit/>
+          </a:bodyPr>
+          <a:lstStyle/>
+          <a:p>
+            <a:pPr>
+              <a:spcAft>
+                <a:spcPts val="400"/>
+              </a:spcAft>
+            </a:pPr>
+            <a:r>
+              <a:rPr sz="1700" b="0">
+                <a:solidFill>
+                  <a:srgbClr val="2B4A7D"/>
+                </a:solidFill>
+                <a:latin typeface="Consolas"/>
+              </a:rPr>
+              <a:t>KeyError: 'discount'</a:t>
+            </a:r>
+          </a:p>
+        </p:txBody>
+      </p:sp>
+      <p:sp>
+        <p:nvSpPr>
+          <p:cNvPr id="6" name="TextBox 5"/>
+          <p:cNvSpPr txBox="1"/>
+          <p:nvPr/>
+        </p:nvSpPr>
+        <p:spPr>
+          <a:xfrm>
+            <a:off x="777240" y="3246120"/>
+            <a:ext cx="10607040" cy="790575"/>
+          </a:xfrm>
+          <a:prstGeom prst="rect">
+            <a:avLst/>
+          </a:prstGeom>
+          <a:noFill/>
+        </p:spPr>
+        <p:txBody>
+          <a:bodyPr wrap="square">
+            <a:spAutoFit/>
+          </a:bodyPr>
+          <a:lstStyle/>
+          <a:p>
+            <a:pPr>
+              <a:spcAft>
+                <a:spcPts val="1000"/>
+              </a:spcAft>
+            </a:pPr>
+            <a:r>
+              <a:rPr sz="2100" b="0">
                 <a:solidFill>
                   <a:srgbClr val="1C1C1A"/>
                 </a:solidFill>
                 <a:latin typeface="Calibri"/>
               </a:rPr>
-              <a:t> </a:t>
-            </a:r>
-          </a:p>
-          <a:p>
-            <a:pPr algn="l"/>
-            <a:r>
-              <a:rPr sz="1700">
-                <a:solidFill>
-                  <a:srgbClr val="2B4A7D"/>
-                </a:solidFill>
-                <a:latin typeface="Consolas"/>
-              </a:rPr>
-              <a:t>KeyError: 'discount'</a:t>
-            </a:r>
-          </a:p>
-          <a:p>
-            <a:pPr algn="l"/>
-            <a:r>
-              <a:rPr b="0" sz="2100">
-                <a:solidFill>
-                  <a:srgbClr val="1C1C1A"/>
-                </a:solidFill>
-                <a:latin typeface="Calibri"/>
-              </a:rPr>
-              <a:t> </a:t>
-            </a:r>
-          </a:p>
-          <a:p>
-            <a:pPr algn="l"/>
-            <a:r>
-              <a:rPr b="0" sz="2100">
-                <a:solidFill>
-                  <a:srgbClr val="1C1C1A"/>
-                </a:solidFill>
-                <a:latin typeface="Calibri"/>
-              </a:rPr>
               <a:t>Two of the thirty orders carry a discount field. Asking a dictionary for a name it does not have stops the program, and the error names the field it went looking for.</a:t>
             </a:r>
           </a:p>
@@ -5898,13 +5984,13 @@
       </p:sp>
       <p:sp>
         <p:nvSpPr>
-          <p:cNvPr id="5" name="TextBox 4"/>
-          <p:cNvSpPr txBox="1"/>
-          <p:nvPr/>
-        </p:nvSpPr>
-        <p:spPr>
-          <a:xfrm>
-            <a:off x="777240" y="6263640"/>
+          <p:cNvPr id="7" name="TextBox 6"/>
+          <p:cNvSpPr txBox="1"/>
+          <p:nvPr/>
+        </p:nvSpPr>
+        <p:spPr>
+          <a:xfrm>
+            <a:off x="777240" y="6309360"/>
             <a:ext cx="10607040" cy="365760"/>
           </a:xfrm>
           <a:prstGeom prst="rect">
@@ -5913,13 +5999,13 @@
           <a:noFill/>
         </p:spPr>
         <p:txBody>
-          <a:bodyPr wrap="square">
-            <a:spAutoFit/>
-          </a:bodyPr>
-          <a:lstStyle/>
-          <a:p>
-            <a:r>
-              <a:rPr sz="1000" b="0">
+          <a:bodyPr wrap="none">
+            <a:spAutoFit/>
+          </a:bodyPr>
+          <a:lstStyle/>
+          <a:p>
+            <a:r>
+              <a:rPr sz="1000">
                 <a:solidFill>
                   <a:srgbClr val="5F6360"/>
                 </a:solidFill>
@@ -6035,7 +6121,7 @@
         <p:spPr>
           <a:xfrm>
             <a:off x="777240" y="1965960"/>
-            <a:ext cx="10607040" cy="4206240"/>
+            <a:ext cx="10607040" cy="1409700"/>
           </a:xfrm>
           <a:prstGeom prst="rect">
             <a:avLst/>
@@ -6048,9 +6134,13 @@
           </a:bodyPr>
           <a:lstStyle/>
           <a:p>
-            <a:pPr algn="l"/>
-            <a:r>
-              <a:rPr b="0" sz="2100">
+            <a:pPr>
+              <a:spcAft>
+                <a:spcPts val="1000"/>
+              </a:spcAft>
+            </a:pPr>
+            <a:r>
+              <a:rPr sz="2100" b="0">
                 <a:solidFill>
                   <a:srgbClr val="1C1C1A"/>
                 </a:solidFill>
@@ -6060,26 +6150,18 @@
             </a:r>
           </a:p>
           <a:p>
-            <a:pPr algn="l"/>
-            <a:r>
-              <a:rPr b="0" sz="2100">
+            <a:pPr>
+              <a:spcAft>
+                <a:spcPts val="1000"/>
+              </a:spcAft>
+            </a:pPr>
+            <a:r>
+              <a:rPr sz="2100" b="0">
                 <a:solidFill>
                   <a:srgbClr val="1C1C1A"/>
                 </a:solidFill>
                 <a:latin typeface="Calibri"/>
               </a:rPr>
-              <a:t> </a:t>
-            </a:r>
-          </a:p>
-          <a:p>
-            <a:pPr algn="l"/>
-            <a:r>
-              <a:rPr b="0" sz="2100">
-                <a:solidFill>
-                  <a:srgbClr val="1C1C1A"/>
-                </a:solidFill>
-                <a:latin typeface="Calibri"/>
-              </a:rPr>
               <a:t>So your code has to say what happens when the name is missing, and that instruction is yours to write.</a:t>
             </a:r>
           </a:p>
@@ -6093,7 +6175,7 @@
         </p:nvSpPr>
         <p:spPr>
           <a:xfrm>
-            <a:off x="777240" y="6263640"/>
+            <a:off x="777240" y="6309360"/>
             <a:ext cx="10607040" cy="365760"/>
           </a:xfrm>
           <a:prstGeom prst="rect">
@@ -6102,13 +6184,13 @@
           <a:noFill/>
         </p:spPr>
         <p:txBody>
-          <a:bodyPr wrap="square">
-            <a:spAutoFit/>
-          </a:bodyPr>
-          <a:lstStyle/>
-          <a:p>
-            <a:r>
-              <a:rPr sz="1000" b="0">
+          <a:bodyPr wrap="none">
+            <a:spAutoFit/>
+          </a:bodyPr>
+          <a:lstStyle/>
+          <a:p>
+            <a:r>
+              <a:rPr sz="1000">
                 <a:solidFill>
                   <a:srgbClr val="5F6360"/>
                 </a:solidFill>
@@ -6224,7 +6306,7 @@
         <p:spPr>
           <a:xfrm>
             <a:off x="777240" y="1965960"/>
-            <a:ext cx="10607040" cy="4206240"/>
+            <a:ext cx="10607040" cy="502920"/>
           </a:xfrm>
           <a:prstGeom prst="rect">
             <a:avLst/>
@@ -6237,9 +6319,13 @@
           </a:bodyPr>
           <a:lstStyle/>
           <a:p>
-            <a:pPr algn="l"/>
-            <a:r>
-              <a:rPr sz="1700">
+            <a:pPr>
+              <a:spcAft>
+                <a:spcPts val="400"/>
+              </a:spcAft>
+            </a:pPr>
+            <a:r>
+              <a:rPr sz="1700" b="0">
                 <a:solidFill>
                   <a:srgbClr val="2B4A7D"/>
                 </a:solidFill>
@@ -6248,60 +6334,58 @@
               <a:t>r.get("discount", 0)</a:t>
             </a:r>
           </a:p>
-          <a:p>
-            <a:pPr algn="l"/>
-            <a:r>
-              <a:rPr b="0" sz="2100">
+        </p:txBody>
+      </p:sp>
+      <p:sp>
+        <p:nvSpPr>
+          <p:cNvPr id="5" name="TextBox 4"/>
+          <p:cNvSpPr txBox="1"/>
+          <p:nvPr/>
+        </p:nvSpPr>
+        <p:spPr>
+          <a:xfrm>
+            <a:off x="777240" y="2606040"/>
+            <a:ext cx="10607040" cy="914400"/>
+          </a:xfrm>
+          <a:prstGeom prst="rect">
+            <a:avLst/>
+          </a:prstGeom>
+          <a:noFill/>
+        </p:spPr>
+        <p:txBody>
+          <a:bodyPr wrap="square">
+            <a:spAutoFit/>
+          </a:bodyPr>
+          <a:lstStyle/>
+          <a:p>
+            <a:pPr>
+              <a:spcAft>
+                <a:spcPts val="1000"/>
+              </a:spcAft>
+            </a:pPr>
+            <a:r>
+              <a:rPr sz="2100" b="0">
                 <a:solidFill>
                   <a:srgbClr val="1C1C1A"/>
                 </a:solidFill>
                 <a:latin typeface="Calibri"/>
               </a:rPr>
-              <a:t> </a:t>
-            </a:r>
-          </a:p>
-          <a:p>
-            <a:pPr algn="l"/>
-            <a:r>
-              <a:rPr b="0" sz="1800">
-                <a:solidFill>
-                  <a:srgbClr val="2B4A7D"/>
-                </a:solidFill>
-                <a:latin typeface="Consolas"/>
-              </a:rPr>
-              <a:t>.get()</a:t>
-            </a:r>
-            <a:r>
-              <a:rPr b="0" sz="2100">
+              <a:t>.get() asks for a name and takes a second value to hand back when that name is absent.</a:t>
+            </a:r>
+          </a:p>
+          <a:p>
+            <a:pPr>
+              <a:spcAft>
+                <a:spcPts val="1000"/>
+              </a:spcAft>
+            </a:pPr>
+            <a:r>
+              <a:rPr sz="2100" b="0">
                 <a:solidFill>
                   <a:srgbClr val="1C1C1A"/>
                 </a:solidFill>
                 <a:latin typeface="Calibri"/>
               </a:rPr>
-              <a:t> asks for a name and takes a second value to hand back when that name is absent.</a:t>
-            </a:r>
-          </a:p>
-          <a:p>
-            <a:pPr algn="l"/>
-            <a:r>
-              <a:rPr b="0" sz="2100">
-                <a:solidFill>
-                  <a:srgbClr val="1C1C1A"/>
-                </a:solidFill>
-                <a:latin typeface="Calibri"/>
-              </a:rPr>
-              <a:t> </a:t>
-            </a:r>
-          </a:p>
-          <a:p>
-            <a:pPr algn="l"/>
-            <a:r>
-              <a:rPr b="0" sz="2100">
-                <a:solidFill>
-                  <a:srgbClr val="1C1C1A"/>
-                </a:solidFill>
-                <a:latin typeface="Calibri"/>
-              </a:rPr>
               <a:t>The program keeps running, and the number that arrives is the number you chose.</a:t>
             </a:r>
           </a:p>
@@ -6309,13 +6393,13 @@
       </p:sp>
       <p:sp>
         <p:nvSpPr>
-          <p:cNvPr id="5" name="TextBox 4"/>
-          <p:cNvSpPr txBox="1"/>
-          <p:nvPr/>
-        </p:nvSpPr>
-        <p:spPr>
-          <a:xfrm>
-            <a:off x="777240" y="6263640"/>
+          <p:cNvPr id="6" name="TextBox 5"/>
+          <p:cNvSpPr txBox="1"/>
+          <p:nvPr/>
+        </p:nvSpPr>
+        <p:spPr>
+          <a:xfrm>
+            <a:off x="777240" y="6309360"/>
             <a:ext cx="10607040" cy="365760"/>
           </a:xfrm>
           <a:prstGeom prst="rect">
@@ -6324,13 +6408,13 @@
           <a:noFill/>
         </p:spPr>
         <p:txBody>
-          <a:bodyPr wrap="square">
-            <a:spAutoFit/>
-          </a:bodyPr>
-          <a:lstStyle/>
-          <a:p>
-            <a:r>
-              <a:rPr sz="1000" b="0">
+          <a:bodyPr wrap="none">
+            <a:spAutoFit/>
+          </a:bodyPr>
+          <a:lstStyle/>
+          <a:p>
+            <a:r>
+              <a:rPr sz="1000">
                 <a:solidFill>
                   <a:srgbClr val="5F6360"/>
                 </a:solidFill>
@@ -6446,7 +6530,7 @@
         <p:spPr>
           <a:xfrm>
             <a:off x="777240" y="1965960"/>
-            <a:ext cx="10607040" cy="4206240"/>
+            <a:ext cx="10607040" cy="914400"/>
           </a:xfrm>
           <a:prstGeom prst="rect">
             <a:avLst/>
@@ -6459,9 +6543,13 @@
           </a:bodyPr>
           <a:lstStyle/>
           <a:p>
-            <a:pPr algn="l"/>
-            <a:r>
-              <a:rPr sz="1700">
+            <a:pPr>
+              <a:spcAft>
+                <a:spcPts val="400"/>
+              </a:spcAft>
+            </a:pPr>
+            <a:r>
+              <a:rPr sz="1700" b="0">
                 <a:solidFill>
                   <a:srgbClr val="2B4A7D"/>
                 </a:solidFill>
@@ -6471,9 +6559,13 @@
             </a:r>
           </a:p>
           <a:p>
-            <a:pPr algn="l"/>
-            <a:r>
-              <a:rPr sz="1700">
+            <a:pPr>
+              <a:spcAft>
+                <a:spcPts val="400"/>
+              </a:spcAft>
+            </a:pPr>
+            <a:r>
+              <a:rPr sz="1700" b="0">
                 <a:solidFill>
                   <a:srgbClr val="2B4A7D"/>
                 </a:solidFill>
@@ -6483,9 +6575,13 @@
             </a:r>
           </a:p>
           <a:p>
-            <a:pPr algn="l"/>
-            <a:r>
-              <a:rPr sz="1700">
+            <a:pPr>
+              <a:spcAft>
+                <a:spcPts val="400"/>
+              </a:spcAft>
+            </a:pPr>
+            <a:r>
+              <a:rPr sz="1700" b="0">
                 <a:solidFill>
                   <a:srgbClr val="2B4A7D"/>
                 </a:solidFill>
@@ -6494,75 +6590,74 @@
               <a:t>    total = total + r.get("discount", 0)</a:t>
             </a:r>
           </a:p>
-          <a:p>
-            <a:pPr algn="l"/>
-            <a:r>
-              <a:rPr b="0" sz="2100">
+        </p:txBody>
+      </p:sp>
+      <p:sp>
+        <p:nvSpPr>
+          <p:cNvPr id="5" name="TextBox 4"/>
+          <p:cNvSpPr txBox="1"/>
+          <p:nvPr/>
+        </p:nvSpPr>
+        <p:spPr>
+          <a:xfrm>
+            <a:off x="777240" y="3017520"/>
+            <a:ext cx="10607040" cy="1781175"/>
+          </a:xfrm>
+          <a:prstGeom prst="rect">
+            <a:avLst/>
+          </a:prstGeom>
+          <a:noFill/>
+        </p:spPr>
+        <p:txBody>
+          <a:bodyPr wrap="square">
+            <a:spAutoFit/>
+          </a:bodyPr>
+          <a:lstStyle/>
+          <a:p>
+            <a:pPr>
+              <a:spcAft>
+                <a:spcPts val="1000"/>
+              </a:spcAft>
+            </a:pPr>
+            <a:r>
+              <a:rPr sz="2100" b="0">
                 <a:solidFill>
                   <a:srgbClr val="1C1C1A"/>
                 </a:solidFill>
                 <a:latin typeface="Calibri"/>
               </a:rPr>
-              <a:t> </a:t>
-            </a:r>
-          </a:p>
-          <a:p>
-            <a:pPr algn="l"/>
-            <a:r>
-              <a:rPr b="0" sz="2100">
+              <a:t>With a default of 0, the thirty records total Rs 250 in discounts, which is the sum of the two discounts the file actually records.</a:t>
+            </a:r>
+          </a:p>
+          <a:p>
+            <a:pPr>
+              <a:spcAft>
+                <a:spcPts val="1000"/>
+              </a:spcAft>
+            </a:pPr>
+            <a:r>
+              <a:rPr sz="2100" b="0">
                 <a:solidFill>
                   <a:srgbClr val="1C1C1A"/>
                 </a:solidFill>
                 <a:latin typeface="Calibri"/>
               </a:rPr>
-              <a:t>With a default of 0, the thirty records total Rs 250 in discounts, which is the sum of the two discounts the file actually records.</a:t>
-            </a:r>
-          </a:p>
-          <a:p>
-            <a:pPr algn="l"/>
-            <a:r>
-              <a:rPr b="0" sz="2100">
+              <a:t>With a default of 100, the same thirty records total Rs 3,050, and Rs 2,800 of that is a number you invented twenty-eight times.</a:t>
+            </a:r>
+          </a:p>
+          <a:p>
+            <a:pPr>
+              <a:spcAft>
+                <a:spcPts val="1000"/>
+              </a:spcAft>
+            </a:pPr>
+            <a:r>
+              <a:rPr sz="2100" b="0">
                 <a:solidFill>
                   <a:srgbClr val="1C1C1A"/>
                 </a:solidFill>
                 <a:latin typeface="Calibri"/>
               </a:rPr>
-              <a:t> </a:t>
-            </a:r>
-          </a:p>
-          <a:p>
-            <a:pPr algn="l"/>
-            <a:r>
-              <a:rPr b="0" sz="2100">
-                <a:solidFill>
-                  <a:srgbClr val="1C1C1A"/>
-                </a:solidFill>
-                <a:latin typeface="Calibri"/>
-              </a:rPr>
-              <a:t>With a default of 100, the same thirty records total Rs 3,050, and Rs 2,800 of that is a number you invented twenty-eight times.</a:t>
-            </a:r>
-          </a:p>
-          <a:p>
-            <a:pPr algn="l"/>
-            <a:r>
-              <a:rPr b="0" sz="2100">
-                <a:solidFill>
-                  <a:srgbClr val="1C1C1A"/>
-                </a:solidFill>
-                <a:latin typeface="Calibri"/>
-              </a:rPr>
-              <a:t> </a:t>
-            </a:r>
-          </a:p>
-          <a:p>
-            <a:pPr algn="l"/>
-            <a:r>
-              <a:rPr b="0" sz="2100">
-                <a:solidFill>
-                  <a:srgbClr val="1C1C1A"/>
-                </a:solidFill>
-                <a:latin typeface="Calibri"/>
-              </a:rPr>
               <a:t>Both cells run to the end. Only one of the two totals is a fact.</a:t>
             </a:r>
           </a:p>
@@ -6570,13 +6665,13 @@
       </p:sp>
       <p:sp>
         <p:nvSpPr>
-          <p:cNvPr id="5" name="TextBox 4"/>
-          <p:cNvSpPr txBox="1"/>
-          <p:nvPr/>
-        </p:nvSpPr>
-        <p:spPr>
-          <a:xfrm>
-            <a:off x="777240" y="6263640"/>
+          <p:cNvPr id="6" name="TextBox 5"/>
+          <p:cNvSpPr txBox="1"/>
+          <p:nvPr/>
+        </p:nvSpPr>
+        <p:spPr>
+          <a:xfrm>
+            <a:off x="777240" y="6309360"/>
             <a:ext cx="10607040" cy="365760"/>
           </a:xfrm>
           <a:prstGeom prst="rect">
@@ -6585,13 +6680,13 @@
           <a:noFill/>
         </p:spPr>
         <p:txBody>
-          <a:bodyPr wrap="square">
-            <a:spAutoFit/>
-          </a:bodyPr>
-          <a:lstStyle/>
-          <a:p>
-            <a:r>
-              <a:rPr sz="1000" b="0">
+          <a:bodyPr wrap="none">
+            <a:spAutoFit/>
+          </a:bodyPr>
+          <a:lstStyle/>
+          <a:p>
+            <a:r>
+              <a:rPr sz="1000">
                 <a:solidFill>
                   <a:srgbClr val="5F6360"/>
                 </a:solidFill>
@@ -6707,7 +6802,7 @@
         <p:spPr>
           <a:xfrm>
             <a:off x="777240" y="1965960"/>
-            <a:ext cx="10607040" cy="4206240"/>
+            <a:ext cx="10607040" cy="1657350"/>
           </a:xfrm>
           <a:prstGeom prst="rect">
             <a:avLst/>
@@ -6720,9 +6815,13 @@
           </a:bodyPr>
           <a:lstStyle/>
           <a:p>
-            <a:pPr algn="l"/>
-            <a:r>
-              <a:rPr b="0" sz="2100">
+            <a:pPr>
+              <a:spcAft>
+                <a:spcPts val="1000"/>
+              </a:spcAft>
+            </a:pPr>
+            <a:r>
+              <a:rPr sz="2100" b="0">
                 <a:solidFill>
                   <a:srgbClr val="1C1C1A"/>
                 </a:solidFill>
@@ -6732,9 +6831,13 @@
             </a:r>
           </a:p>
           <a:p>
-            <a:pPr algn="l"/>
-            <a:r>
-              <a:rPr b="0" sz="2100">
+            <a:pPr>
+              <a:spcAft>
+                <a:spcPts val="1000"/>
+              </a:spcAft>
+            </a:pPr>
+            <a:r>
+              <a:rPr sz="2100" b="0">
                 <a:solidFill>
                   <a:srgbClr val="1C1C1A"/>
                 </a:solidFill>
@@ -6744,44 +6847,34 @@
             </a:r>
           </a:p>
           <a:p>
-            <a:pPr algn="l"/>
-            <a:r>
-              <a:rPr b="0" sz="2100">
+            <a:pPr>
+              <a:spcAft>
+                <a:spcPts val="1000"/>
+              </a:spcAft>
+            </a:pPr>
+            <a:r>
+              <a:rPr sz="2100" b="0">
                 <a:solidFill>
                   <a:srgbClr val="1C1C1A"/>
                 </a:solidFill>
                 <a:latin typeface="Calibri"/>
               </a:rPr>
-              <a:t>3. A </a:t>
-            </a:r>
-            <a:r>
-              <a:rPr b="0" sz="1800">
-                <a:solidFill>
-                  <a:srgbClr val="2B4A7D"/>
-                </a:solidFill>
-                <a:latin typeface="Consolas"/>
-              </a:rPr>
-              <a:t>KeyError</a:t>
-            </a:r>
-            <a:r>
-              <a:rPr b="0" sz="2100">
+              <a:t>3. A KeyError means that name is absent from that record.</a:t>
+            </a:r>
+          </a:p>
+          <a:p>
+            <a:pPr>
+              <a:spcAft>
+                <a:spcPts val="1000"/>
+              </a:spcAft>
+            </a:pPr>
+            <a:r>
+              <a:rPr sz="2100" b="0">
                 <a:solidFill>
                   <a:srgbClr val="1C1C1A"/>
                 </a:solidFill>
                 <a:latin typeface="Calibri"/>
               </a:rPr>
-              <a:t> means that name is absent from that record.</a:t>
-            </a:r>
-          </a:p>
-          <a:p>
-            <a:pPr algn="l"/>
-            <a:r>
-              <a:rPr b="0" sz="2100">
-                <a:solidFill>
-                  <a:srgbClr val="1C1C1A"/>
-                </a:solidFill>
-                <a:latin typeface="Calibri"/>
-              </a:rPr>
               <a:t>4. State your default out loud, because it becomes part of your answer.</a:t>
             </a:r>
           </a:p>
@@ -6795,7 +6888,7 @@
         </p:nvSpPr>
         <p:spPr>
           <a:xfrm>
-            <a:off x="777240" y="6263640"/>
+            <a:off x="777240" y="6309360"/>
             <a:ext cx="10607040" cy="365760"/>
           </a:xfrm>
           <a:prstGeom prst="rect">
@@ -6804,13 +6897,13 @@
           <a:noFill/>
         </p:spPr>
         <p:txBody>
-          <a:bodyPr wrap="square">
-            <a:spAutoFit/>
-          </a:bodyPr>
-          <a:lstStyle/>
-          <a:p>
-            <a:r>
-              <a:rPr sz="1000" b="0">
+          <a:bodyPr wrap="none">
+            <a:spAutoFit/>
+          </a:bodyPr>
+          <a:lstStyle/>
+          <a:p>
+            <a:r>
+              <a:rPr sz="1000">
                 <a:solidFill>
                   <a:srgbClr val="5F6360"/>
                 </a:solidFill>
@@ -6905,6 +6998,7 @@
           </a:bodyPr>
           <a:lstStyle/>
           <a:p>
+            <a:pPr algn="ctr"/>
             <a:r>
               <a:rPr sz="3600" b="1">
                 <a:solidFill>
@@ -6926,7 +7020,7 @@
         <p:spPr>
           <a:xfrm>
             <a:off x="777240" y="1965960"/>
-            <a:ext cx="10607040" cy="4206240"/>
+            <a:ext cx="10607040" cy="790575"/>
           </a:xfrm>
           <a:prstGeom prst="rect">
             <a:avLst/>
@@ -6939,22 +7033,26 @@
           </a:bodyPr>
           <a:lstStyle/>
           <a:p>
-            <a:pPr algn="l"/>
-            <a:r>
-              <a:rPr b="0" sz="1800">
+            <a:pPr algn="ctr">
+              <a:spcAft>
+                <a:spcPts val="1000"/>
+              </a:spcAft>
+            </a:pPr>
+            <a:r>
+              <a:rPr sz="2100" b="0">
                 <a:solidFill>
                   <a:srgbClr val="FFFFFF"/>
                 </a:solidFill>
-                <a:latin typeface="Consolas"/>
+                <a:latin typeface="Calibri"/>
               </a:rPr>
               <a:t>[open the workbench] &gt; [the kernel remembers] &gt; [type decides] &gt; [walk the records] &gt; </a:t>
             </a:r>
             <a:r>
-              <a:rPr b="1" sz="1800">
+              <a:rPr sz="2100" b="1">
                 <a:solidFill>
                   <a:srgbClr val="FFFFFF"/>
                 </a:solidFill>
-                <a:latin typeface="Consolas"/>
+                <a:latin typeface="Calibri"/>
               </a:rPr>
               <a:t>[the business answer]</a:t>
             </a:r>
@@ -6969,7 +7067,7 @@
         </p:nvSpPr>
         <p:spPr>
           <a:xfrm>
-            <a:off x="777240" y="6263640"/>
+            <a:off x="777240" y="6309360"/>
             <a:ext cx="10607040" cy="365760"/>
           </a:xfrm>
           <a:prstGeom prst="rect">
@@ -6978,13 +7076,13 @@
           <a:noFill/>
         </p:spPr>
         <p:txBody>
-          <a:bodyPr wrap="square">
-            <a:spAutoFit/>
-          </a:bodyPr>
-          <a:lstStyle/>
-          <a:p>
-            <a:r>
-              <a:rPr sz="1000" b="0">
+          <a:bodyPr wrap="none">
+            <a:spAutoFit/>
+          </a:bodyPr>
+          <a:lstStyle/>
+          <a:p>
+            <a:r>
+              <a:rPr sz="1000">
                 <a:solidFill>
                   <a:srgbClr val="5F6360"/>
                 </a:solidFill>
@@ -7100,7 +7198,7 @@
         <p:spPr>
           <a:xfrm>
             <a:off x="777240" y="1965960"/>
-            <a:ext cx="10607040" cy="4206240"/>
+            <a:ext cx="10607040" cy="1562100"/>
           </a:xfrm>
           <a:prstGeom prst="rect">
             <a:avLst/>
@@ -7113,9 +7211,13 @@
           </a:bodyPr>
           <a:lstStyle/>
           <a:p>
-            <a:pPr algn="l"/>
-            <a:r>
-              <a:rPr sz="1700">
+            <a:pPr>
+              <a:spcAft>
+                <a:spcPts val="400"/>
+              </a:spcAft>
+            </a:pPr>
+            <a:r>
+              <a:rPr sz="1700" b="0">
                 <a:solidFill>
                   <a:srgbClr val="2B4A7D"/>
                 </a:solidFill>
@@ -7125,9 +7227,13 @@
             </a:r>
           </a:p>
           <a:p>
-            <a:pPr algn="l"/>
-            <a:r>
-              <a:rPr sz="1700">
+            <a:pPr>
+              <a:spcAft>
+                <a:spcPts val="400"/>
+              </a:spcAft>
+            </a:pPr>
+            <a:r>
+              <a:rPr sz="1700" b="0">
                 <a:solidFill>
                   <a:srgbClr val="2B4A7D"/>
                 </a:solidFill>
@@ -7137,9 +7243,13 @@
             </a:r>
           </a:p>
           <a:p>
-            <a:pPr algn="l"/>
-            <a:r>
-              <a:rPr sz="1700">
+            <a:pPr>
+              <a:spcAft>
+                <a:spcPts val="400"/>
+              </a:spcAft>
+            </a:pPr>
+            <a:r>
+              <a:rPr sz="1700" b="0">
                 <a:solidFill>
                   <a:srgbClr val="2B4A7D"/>
                 </a:solidFill>
@@ -7149,9 +7259,13 @@
             </a:r>
           </a:p>
           <a:p>
-            <a:pPr algn="l"/>
-            <a:r>
-              <a:rPr sz="1700">
+            <a:pPr>
+              <a:spcAft>
+                <a:spcPts val="400"/>
+              </a:spcAft>
+            </a:pPr>
+            <a:r>
+              <a:rPr sz="1700" b="0">
                 <a:solidFill>
                   <a:srgbClr val="2B4A7D"/>
                 </a:solidFill>
@@ -7160,27 +7274,42 @@
               <a:t>]</a:t>
             </a:r>
           </a:p>
-          <a:p>
-            <a:pPr algn="l"/>
-            <a:r>
-              <a:rPr b="0" sz="2100">
+        </p:txBody>
+      </p:sp>
+      <p:sp>
+        <p:nvSpPr>
+          <p:cNvPr id="5" name="TextBox 4"/>
+          <p:cNvSpPr txBox="1"/>
+          <p:nvPr/>
+        </p:nvSpPr>
+        <p:spPr>
+          <a:xfrm>
+            <a:off x="777240" y="3665219"/>
+            <a:ext cx="10607040" cy="790575"/>
+          </a:xfrm>
+          <a:prstGeom prst="rect">
+            <a:avLst/>
+          </a:prstGeom>
+          <a:noFill/>
+        </p:spPr>
+        <p:txBody>
+          <a:bodyPr wrap="square">
+            <a:spAutoFit/>
+          </a:bodyPr>
+          <a:lstStyle/>
+          <a:p>
+            <a:pPr>
+              <a:spcAft>
+                <a:spcPts val="1000"/>
+              </a:spcAft>
+            </a:pPr>
+            <a:r>
+              <a:rPr sz="2100" b="0">
                 <a:solidFill>
                   <a:srgbClr val="1C1C1A"/>
                 </a:solidFill>
                 <a:latin typeface="Calibri"/>
               </a:rPr>
-              <a:t> </a:t>
-            </a:r>
-          </a:p>
-          <a:p>
-            <a:pPr algn="l"/>
-            <a:r>
-              <a:rPr b="0" sz="2100">
-                <a:solidFill>
-                  <a:srgbClr val="1C1C1A"/>
-                </a:solidFill>
-                <a:latin typeface="Calibri"/>
-              </a:rPr>
               <a:t>Thirty records in one list, and each record is a dictionary carrying the same field names. That is the entire shape of the data you have worked on all day.</a:t>
             </a:r>
           </a:p>
@@ -7188,13 +7317,13 @@
       </p:sp>
       <p:sp>
         <p:nvSpPr>
-          <p:cNvPr id="5" name="TextBox 4"/>
-          <p:cNvSpPr txBox="1"/>
-          <p:nvPr/>
-        </p:nvSpPr>
-        <p:spPr>
-          <a:xfrm>
-            <a:off x="777240" y="6263640"/>
+          <p:cNvPr id="6" name="TextBox 5"/>
+          <p:cNvSpPr txBox="1"/>
+          <p:nvPr/>
+        </p:nvSpPr>
+        <p:spPr>
+          <a:xfrm>
+            <a:off x="777240" y="6309360"/>
             <a:ext cx="10607040" cy="365760"/>
           </a:xfrm>
           <a:prstGeom prst="rect">
@@ -7203,13 +7332,13 @@
           <a:noFill/>
         </p:spPr>
         <p:txBody>
-          <a:bodyPr wrap="square">
-            <a:spAutoFit/>
-          </a:bodyPr>
-          <a:lstStyle/>
-          <a:p>
-            <a:r>
-              <a:rPr sz="1000" b="0">
+          <a:bodyPr wrap="none">
+            <a:spAutoFit/>
+          </a:bodyPr>
+          <a:lstStyle/>
+          <a:p>
+            <a:r>
+              <a:rPr sz="1000">
                 <a:solidFill>
                   <a:srgbClr val="5F6360"/>
                 </a:solidFill>
@@ -7325,7 +7454,7 @@
         <p:spPr>
           <a:xfrm>
             <a:off x="777240" y="1965960"/>
-            <a:ext cx="10607040" cy="4206240"/>
+            <a:ext cx="10607040" cy="1162050"/>
           </a:xfrm>
           <a:prstGeom prst="rect">
             <a:avLst/>
@@ -7338,9 +7467,13 @@
           </a:bodyPr>
           <a:lstStyle/>
           <a:p>
-            <a:pPr algn="l"/>
-            <a:r>
-              <a:rPr sz="1700">
+            <a:pPr>
+              <a:spcAft>
+                <a:spcPts val="400"/>
+              </a:spcAft>
+            </a:pPr>
+            <a:r>
+              <a:rPr sz="1700" b="0">
                 <a:solidFill>
                   <a:srgbClr val="2B4A7D"/>
                 </a:solidFill>
@@ -7350,9 +7483,13 @@
             </a:r>
           </a:p>
           <a:p>
-            <a:pPr algn="l"/>
-            <a:r>
-              <a:rPr sz="1700">
+            <a:pPr>
+              <a:spcAft>
+                <a:spcPts val="400"/>
+              </a:spcAft>
+            </a:pPr>
+            <a:r>
+              <a:rPr sz="1700" b="0">
                 <a:solidFill>
                   <a:srgbClr val="2B4A7D"/>
                 </a:solidFill>
@@ -7362,9 +7499,13 @@
             </a:r>
           </a:p>
           <a:p>
-            <a:pPr algn="l"/>
-            <a:r>
-              <a:rPr sz="1700">
+            <a:pPr>
+              <a:spcAft>
+                <a:spcPts val="400"/>
+              </a:spcAft>
+            </a:pPr>
+            <a:r>
+              <a:rPr sz="1700" b="0">
                 <a:solidFill>
                   <a:srgbClr val="2B4A7D"/>
                 </a:solidFill>
@@ -7374,9 +7515,13 @@
             </a:r>
           </a:p>
           <a:p>
-            <a:pPr algn="l"/>
-            <a:r>
-              <a:rPr sz="1700">
+            <a:pPr>
+              <a:spcAft>
+                <a:spcPts val="400"/>
+              </a:spcAft>
+            </a:pPr>
+            <a:r>
+              <a:rPr sz="1700" b="0">
                 <a:solidFill>
                   <a:srgbClr val="2B4A7D"/>
                 </a:solidFill>
@@ -7385,51 +7530,58 @@
               <a:t>        total = total + int(r["amount"])</a:t>
             </a:r>
           </a:p>
-          <a:p>
-            <a:pPr algn="l"/>
-            <a:r>
-              <a:rPr b="0" sz="2100">
+        </p:txBody>
+      </p:sp>
+      <p:sp>
+        <p:nvSpPr>
+          <p:cNvPr id="5" name="TextBox 4"/>
+          <p:cNvSpPr txBox="1"/>
+          <p:nvPr/>
+        </p:nvSpPr>
+        <p:spPr>
+          <a:xfrm>
+            <a:off x="777240" y="3265169"/>
+            <a:ext cx="10607040" cy="1409700"/>
+          </a:xfrm>
+          <a:prstGeom prst="rect">
+            <a:avLst/>
+          </a:prstGeom>
+          <a:noFill/>
+        </p:spPr>
+        <p:txBody>
+          <a:bodyPr wrap="square">
+            <a:spAutoFit/>
+          </a:bodyPr>
+          <a:lstStyle/>
+          <a:p>
+            <a:pPr>
+              <a:spcAft>
+                <a:spcPts val="1000"/>
+              </a:spcAft>
+            </a:pPr>
+            <a:r>
+              <a:rPr sz="2100" b="0">
                 <a:solidFill>
                   <a:srgbClr val="1C1C1A"/>
                 </a:solidFill>
                 <a:latin typeface="Calibri"/>
               </a:rPr>
-              <a:t> </a:t>
-            </a:r>
-          </a:p>
-          <a:p>
-            <a:pPr algn="l"/>
-            <a:r>
-              <a:rPr b="0" sz="2100">
+              <a:t>This is the cell the day ends on, and it answers the question you were shown at the start: "Of these thirty Kalpa Retail orders, how much did we actually collect?"</a:t>
+            </a:r>
+          </a:p>
+          <a:p>
+            <a:pPr>
+              <a:spcAft>
+                <a:spcPts val="1000"/>
+              </a:spcAft>
+            </a:pPr>
+            <a:r>
+              <a:rPr sz="2100" b="0">
                 <a:solidFill>
                   <a:srgbClr val="1C1C1A"/>
                 </a:solidFill>
                 <a:latin typeface="Calibri"/>
               </a:rPr>
-              <a:t>This is the cell the day ends on, and it answers the question you were shown at the start: "Of these thirty Kalpa Retail orders, how much did we actually collect?"</a:t>
-            </a:r>
-          </a:p>
-          <a:p>
-            <a:pPr algn="l"/>
-            <a:r>
-              <a:rPr b="0" sz="2100">
-                <a:solidFill>
-                  <a:srgbClr val="1C1C1A"/>
-                </a:solidFill>
-                <a:latin typeface="Calibri"/>
-              </a:rPr>
-              <a:t> </a:t>
-            </a:r>
-          </a:p>
-          <a:p>
-            <a:pPr algn="l"/>
-            <a:r>
-              <a:rPr b="0" sz="2100">
-                <a:solidFill>
-                  <a:srgbClr val="1C1C1A"/>
-                </a:solidFill>
-                <a:latin typeface="Calibri"/>
-              </a:rPr>
               <a:t>The converter sits there because you now know one amount in this file is text, and the cell should not depend on which records happen to be tidy.</a:t>
             </a:r>
           </a:p>
@@ -7437,13 +7589,13 @@
       </p:sp>
       <p:sp>
         <p:nvSpPr>
-          <p:cNvPr id="5" name="TextBox 4"/>
-          <p:cNvSpPr txBox="1"/>
-          <p:nvPr/>
-        </p:nvSpPr>
-        <p:spPr>
-          <a:xfrm>
-            <a:off x="777240" y="6263640"/>
+          <p:cNvPr id="6" name="TextBox 5"/>
+          <p:cNvSpPr txBox="1"/>
+          <p:nvPr/>
+        </p:nvSpPr>
+        <p:spPr>
+          <a:xfrm>
+            <a:off x="777240" y="6309360"/>
             <a:ext cx="10607040" cy="365760"/>
           </a:xfrm>
           <a:prstGeom prst="rect">
@@ -7452,13 +7604,13 @@
           <a:noFill/>
         </p:spPr>
         <p:txBody>
-          <a:bodyPr wrap="square">
-            <a:spAutoFit/>
-          </a:bodyPr>
-          <a:lstStyle/>
-          <a:p>
-            <a:r>
-              <a:rPr sz="1000" b="0">
+          <a:bodyPr wrap="none">
+            <a:spAutoFit/>
+          </a:bodyPr>
+          <a:lstStyle/>
+          <a:p>
+            <a:r>
+              <a:rPr sz="1000">
                 <a:solidFill>
                   <a:srgbClr val="5F6360"/>
                 </a:solidFill>
@@ -7574,7 +7726,7 @@
         <p:spPr>
           <a:xfrm>
             <a:off x="777240" y="1965960"/>
-            <a:ext cx="10607040" cy="4206240"/>
+            <a:ext cx="10607040" cy="1657350"/>
           </a:xfrm>
           <a:prstGeom prst="rect">
             <a:avLst/>
@@ -7587,9 +7739,13 @@
           </a:bodyPr>
           <a:lstStyle/>
           <a:p>
-            <a:pPr algn="l"/>
-            <a:r>
-              <a:rPr b="0" sz="2100">
+            <a:pPr>
+              <a:spcAft>
+                <a:spcPts val="1000"/>
+              </a:spcAft>
+            </a:pPr>
+            <a:r>
+              <a:rPr sz="2100" b="0">
                 <a:solidFill>
                   <a:srgbClr val="1C1C1A"/>
                 </a:solidFill>
@@ -7599,9 +7755,13 @@
             </a:r>
           </a:p>
           <a:p>
-            <a:pPr algn="l"/>
-            <a:r>
-              <a:rPr b="0" sz="2100">
+            <a:pPr>
+              <a:spcAft>
+                <a:spcPts val="1000"/>
+              </a:spcAft>
+            </a:pPr>
+            <a:r>
+              <a:rPr sz="2100" b="0">
                 <a:solidFill>
                   <a:srgbClr val="1C1C1A"/>
                 </a:solidFill>
@@ -7611,9 +7771,13 @@
             </a:r>
           </a:p>
           <a:p>
-            <a:pPr algn="l"/>
-            <a:r>
-              <a:rPr b="0" sz="2100">
+            <a:pPr>
+              <a:spcAft>
+                <a:spcPts val="1000"/>
+              </a:spcAft>
+            </a:pPr>
+            <a:r>
+              <a:rPr sz="2100" b="0">
                 <a:solidFill>
                   <a:srgbClr val="1C1C1A"/>
                 </a:solidFill>
@@ -7623,9 +7787,13 @@
             </a:r>
           </a:p>
           <a:p>
-            <a:pPr algn="l"/>
-            <a:r>
-              <a:rPr b="0" sz="2100">
+            <a:pPr>
+              <a:spcAft>
+                <a:spcPts val="1000"/>
+              </a:spcAft>
+            </a:pPr>
+            <a:r>
+              <a:rPr sz="2100" b="0">
                 <a:solidFill>
                   <a:srgbClr val="1C1C1A"/>
                 </a:solidFill>
@@ -7644,7 +7812,7 @@
         </p:nvSpPr>
         <p:spPr>
           <a:xfrm>
-            <a:off x="777240" y="6263640"/>
+            <a:off x="777240" y="6309360"/>
             <a:ext cx="10607040" cy="365760"/>
           </a:xfrm>
           <a:prstGeom prst="rect">
@@ -7653,13 +7821,13 @@
           <a:noFill/>
         </p:spPr>
         <p:txBody>
-          <a:bodyPr wrap="square">
-            <a:spAutoFit/>
-          </a:bodyPr>
-          <a:lstStyle/>
-          <a:p>
-            <a:r>
-              <a:rPr sz="1000" b="0">
+          <a:bodyPr wrap="none">
+            <a:spAutoFit/>
+          </a:bodyPr>
+          <a:lstStyle/>
+          <a:p>
+            <a:r>
+              <a:rPr sz="1000">
                 <a:solidFill>
                   <a:srgbClr val="5F6360"/>
                 </a:solidFill>
@@ -7775,7 +7943,7 @@
         <p:spPr>
           <a:xfrm>
             <a:off x="777240" y="1965960"/>
-            <a:ext cx="10607040" cy="4206240"/>
+            <a:ext cx="10607040" cy="1657350"/>
           </a:xfrm>
           <a:prstGeom prst="rect">
             <a:avLst/>
@@ -7788,9 +7956,13 @@
           </a:bodyPr>
           <a:lstStyle/>
           <a:p>
-            <a:pPr algn="l"/>
-            <a:r>
-              <a:rPr b="0" sz="2100">
+            <a:pPr>
+              <a:spcAft>
+                <a:spcPts val="1000"/>
+              </a:spcAft>
+            </a:pPr>
+            <a:r>
+              <a:rPr sz="2100" b="0">
                 <a:solidFill>
                   <a:srgbClr val="1C1C1A"/>
                 </a:solidFill>
@@ -7800,9 +7972,13 @@
             </a:r>
           </a:p>
           <a:p>
-            <a:pPr algn="l"/>
-            <a:r>
-              <a:rPr b="0" sz="2100">
+            <a:pPr>
+              <a:spcAft>
+                <a:spcPts val="1000"/>
+              </a:spcAft>
+            </a:pPr>
+            <a:r>
+              <a:rPr sz="2100" b="0">
                 <a:solidFill>
                   <a:srgbClr val="1C1C1A"/>
                 </a:solidFill>
@@ -7812,9 +7988,13 @@
             </a:r>
           </a:p>
           <a:p>
-            <a:pPr algn="l"/>
-            <a:r>
-              <a:rPr b="0" sz="2100">
+            <a:pPr>
+              <a:spcAft>
+                <a:spcPts val="1000"/>
+              </a:spcAft>
+            </a:pPr>
+            <a:r>
+              <a:rPr sz="2100" b="0">
                 <a:solidFill>
                   <a:srgbClr val="1C1C1A"/>
                 </a:solidFill>
@@ -7824,26 +8004,18 @@
             </a:r>
           </a:p>
           <a:p>
-            <a:pPr algn="l"/>
-            <a:r>
-              <a:rPr b="0" sz="2100">
+            <a:pPr>
+              <a:spcAft>
+                <a:spcPts val="1000"/>
+              </a:spcAft>
+            </a:pPr>
+            <a:r>
+              <a:rPr sz="2100" b="0">
                 <a:solidFill>
                   <a:srgbClr val="1C1C1A"/>
                 </a:solidFill>
                 <a:latin typeface="Calibri"/>
               </a:rPr>
-              <a:t> </a:t>
-            </a:r>
-          </a:p>
-          <a:p>
-            <a:pPr algn="l"/>
-            <a:r>
-              <a:rPr b="0" sz="2100">
-                <a:solidFill>
-                  <a:srgbClr val="1C1C1A"/>
-                </a:solidFill>
-                <a:latin typeface="Calibri"/>
-              </a:rPr>
               <a:t>No hints on these. Work on your own Codespace, and the solution is released at close.</a:t>
             </a:r>
           </a:p>
@@ -7857,7 +8029,7 @@
         </p:nvSpPr>
         <p:spPr>
           <a:xfrm>
-            <a:off x="777240" y="6263640"/>
+            <a:off x="777240" y="6309360"/>
             <a:ext cx="10607040" cy="365760"/>
           </a:xfrm>
           <a:prstGeom prst="rect">
@@ -7866,13 +8038,13 @@
           <a:noFill/>
         </p:spPr>
         <p:txBody>
-          <a:bodyPr wrap="square">
-            <a:spAutoFit/>
-          </a:bodyPr>
-          <a:lstStyle/>
-          <a:p>
-            <a:r>
-              <a:rPr sz="1000" b="0">
+          <a:bodyPr wrap="none">
+            <a:spAutoFit/>
+          </a:bodyPr>
+          <a:lstStyle/>
+          <a:p>
+            <a:r>
+              <a:rPr sz="1000">
                 <a:solidFill>
                   <a:srgbClr val="5F6360"/>
                 </a:solidFill>
@@ -7988,7 +8160,7 @@
         <p:spPr>
           <a:xfrm>
             <a:off x="777240" y="1965960"/>
-            <a:ext cx="10607040" cy="4206240"/>
+            <a:ext cx="10607040" cy="1162050"/>
           </a:xfrm>
           <a:prstGeom prst="rect">
             <a:avLst/>
@@ -8001,9 +8173,13 @@
           </a:bodyPr>
           <a:lstStyle/>
           <a:p>
-            <a:pPr algn="l"/>
-            <a:r>
-              <a:rPr b="0" sz="2100">
+            <a:pPr>
+              <a:spcAft>
+                <a:spcPts val="1000"/>
+              </a:spcAft>
+            </a:pPr>
+            <a:r>
+              <a:rPr sz="2100" b="0">
                 <a:solidFill>
                   <a:srgbClr val="1C1C1A"/>
                 </a:solidFill>
@@ -8013,26 +8189,18 @@
             </a:r>
           </a:p>
           <a:p>
-            <a:pPr algn="l"/>
-            <a:r>
-              <a:rPr b="0" sz="2100">
+            <a:pPr>
+              <a:spcAft>
+                <a:spcPts val="1000"/>
+              </a:spcAft>
+            </a:pPr>
+            <a:r>
+              <a:rPr sz="2100" b="0">
                 <a:solidFill>
                   <a:srgbClr val="1C1C1A"/>
                 </a:solidFill>
                 <a:latin typeface="Calibri"/>
               </a:rPr>
-              <a:t> </a:t>
-            </a:r>
-          </a:p>
-          <a:p>
-            <a:pPr algn="l"/>
-            <a:r>
-              <a:rPr b="0" sz="2100">
-                <a:solidFill>
-                  <a:srgbClr val="1C1C1A"/>
-                </a:solidFill>
-                <a:latin typeface="Calibri"/>
-              </a:rPr>
               <a:t>Nobody has told you whether the file will cooperate with that question.</a:t>
             </a:r>
           </a:p>
@@ -8046,7 +8214,7 @@
         </p:nvSpPr>
         <p:spPr>
           <a:xfrm>
-            <a:off x="777240" y="6263640"/>
+            <a:off x="777240" y="6309360"/>
             <a:ext cx="10607040" cy="365760"/>
           </a:xfrm>
           <a:prstGeom prst="rect">
@@ -8055,13 +8223,13 @@
           <a:noFill/>
         </p:spPr>
         <p:txBody>
-          <a:bodyPr wrap="square">
-            <a:spAutoFit/>
-          </a:bodyPr>
-          <a:lstStyle/>
-          <a:p>
-            <a:r>
-              <a:rPr sz="1000" b="0">
+          <a:bodyPr wrap="none">
+            <a:spAutoFit/>
+          </a:bodyPr>
+          <a:lstStyle/>
+          <a:p>
+            <a:r>
+              <a:rPr sz="1000">
                 <a:solidFill>
                   <a:srgbClr val="5F6360"/>
                 </a:solidFill>
@@ -8177,7 +8345,7 @@
         <p:spPr>
           <a:xfrm>
             <a:off x="777240" y="1965960"/>
-            <a:ext cx="10607040" cy="4206240"/>
+            <a:ext cx="10607040" cy="1409700"/>
           </a:xfrm>
           <a:prstGeom prst="rect">
             <a:avLst/>
@@ -8190,9 +8358,13 @@
           </a:bodyPr>
           <a:lstStyle/>
           <a:p>
-            <a:pPr algn="l"/>
-            <a:r>
-              <a:rPr b="0" sz="2100">
+            <a:pPr>
+              <a:spcAft>
+                <a:spcPts val="1000"/>
+              </a:spcAft>
+            </a:pPr>
+            <a:r>
+              <a:rPr sz="2100" b="0">
                 <a:solidFill>
                   <a:srgbClr val="1C1C1A"/>
                 </a:solidFill>
@@ -8202,26 +8374,18 @@
             </a:r>
           </a:p>
           <a:p>
-            <a:pPr algn="l"/>
-            <a:r>
-              <a:rPr b="0" sz="2100">
+            <a:pPr>
+              <a:spcAft>
+                <a:spcPts val="1000"/>
+              </a:spcAft>
+            </a:pPr>
+            <a:r>
+              <a:rPr sz="2100" b="0">
                 <a:solidFill>
                   <a:srgbClr val="1C1C1A"/>
                 </a:solidFill>
                 <a:latin typeface="Calibri"/>
               </a:rPr>
-              <a:t> </a:t>
-            </a:r>
-          </a:p>
-          <a:p>
-            <a:pPr algn="l"/>
-            <a:r>
-              <a:rPr b="0" sz="2100">
-                <a:solidFill>
-                  <a:srgbClr val="1C1C1A"/>
-                </a:solidFill>
-                <a:latin typeface="Calibri"/>
-              </a:rPr>
               <a:t>A file has forgotten every type it ever knew. Every amount, every status and every date arrives as text, and the cell you just wrote has to survive that.</a:t>
             </a:r>
           </a:p>
@@ -8235,7 +8399,7 @@
         </p:nvSpPr>
         <p:spPr>
           <a:xfrm>
-            <a:off x="777240" y="6263640"/>
+            <a:off x="777240" y="6309360"/>
             <a:ext cx="10607040" cy="365760"/>
           </a:xfrm>
           <a:prstGeom prst="rect">
@@ -8244,13 +8408,13 @@
           <a:noFill/>
         </p:spPr>
         <p:txBody>
-          <a:bodyPr wrap="square">
-            <a:spAutoFit/>
-          </a:bodyPr>
-          <a:lstStyle/>
-          <a:p>
-            <a:r>
-              <a:rPr sz="1000" b="0">
+          <a:bodyPr wrap="none">
+            <a:spAutoFit/>
+          </a:bodyPr>
+          <a:lstStyle/>
+          <a:p>
+            <a:r>
+              <a:rPr sz="1000">
                 <a:solidFill>
                   <a:srgbClr val="5F6360"/>
                 </a:solidFill>
@@ -8366,7 +8530,7 @@
         <p:spPr>
           <a:xfrm>
             <a:off x="777240" y="1965960"/>
-            <a:ext cx="10607040" cy="4206240"/>
+            <a:ext cx="10607040" cy="790575"/>
           </a:xfrm>
           <a:prstGeom prst="rect">
             <a:avLst/>
@@ -8379,9 +8543,13 @@
           </a:bodyPr>
           <a:lstStyle/>
           <a:p>
-            <a:pPr algn="l"/>
-            <a:r>
-              <a:rPr b="0" sz="2100">
+            <a:pPr>
+              <a:spcAft>
+                <a:spcPts val="1000"/>
+              </a:spcAft>
+            </a:pPr>
+            <a:r>
+              <a:rPr sz="2100" b="0">
                 <a:solidFill>
                   <a:srgbClr val="1C1C1A"/>
                 </a:solidFill>
@@ -8400,7 +8568,7 @@
         </p:nvSpPr>
         <p:spPr>
           <a:xfrm>
-            <a:off x="777240" y="6263640"/>
+            <a:off x="777240" y="6309360"/>
             <a:ext cx="10607040" cy="365760"/>
           </a:xfrm>
           <a:prstGeom prst="rect">
@@ -8409,13 +8577,13 @@
           <a:noFill/>
         </p:spPr>
         <p:txBody>
-          <a:bodyPr wrap="square">
-            <a:spAutoFit/>
-          </a:bodyPr>
-          <a:lstStyle/>
-          <a:p>
-            <a:r>
-              <a:rPr sz="1000" b="0">
+          <a:bodyPr wrap="none">
+            <a:spAutoFit/>
+          </a:bodyPr>
+          <a:lstStyle/>
+          <a:p>
+            <a:r>
+              <a:rPr sz="1000">
                 <a:solidFill>
                   <a:srgbClr val="5F6360"/>
                 </a:solidFill>
@@ -8531,7 +8699,7 @@
         <p:spPr>
           <a:xfrm>
             <a:off x="777240" y="1965960"/>
-            <a:ext cx="10607040" cy="4206240"/>
+            <a:ext cx="10607040" cy="790575"/>
           </a:xfrm>
           <a:prstGeom prst="rect">
             <a:avLst/>
@@ -8544,9 +8712,13 @@
           </a:bodyPr>
           <a:lstStyle/>
           <a:p>
-            <a:pPr algn="l"/>
-            <a:r>
-              <a:rPr b="0" sz="2100">
+            <a:pPr>
+              <a:spcAft>
+                <a:spcPts val="1000"/>
+              </a:spcAft>
+            </a:pPr>
+            <a:r>
+              <a:rPr sz="2100" b="0">
                 <a:solidFill>
                   <a:srgbClr val="1C1C1A"/>
                 </a:solidFill>
@@ -8565,7 +8737,7 @@
         </p:nvSpPr>
         <p:spPr>
           <a:xfrm>
-            <a:off x="777240" y="6263640"/>
+            <a:off x="777240" y="6309360"/>
             <a:ext cx="10607040" cy="365760"/>
           </a:xfrm>
           <a:prstGeom prst="rect">
@@ -8574,13 +8746,13 @@
           <a:noFill/>
         </p:spPr>
         <p:txBody>
-          <a:bodyPr wrap="square">
-            <a:spAutoFit/>
-          </a:bodyPr>
-          <a:lstStyle/>
-          <a:p>
-            <a:r>
-              <a:rPr sz="1000" b="0">
+          <a:bodyPr wrap="none">
+            <a:spAutoFit/>
+          </a:bodyPr>
+          <a:lstStyle/>
+          <a:p>
+            <a:r>
+              <a:rPr sz="1000">
                 <a:solidFill>
                   <a:srgbClr val="5F6360"/>
                 </a:solidFill>
@@ -8675,6 +8847,7 @@
           </a:bodyPr>
           <a:lstStyle/>
           <a:p>
+            <a:pPr algn="ctr"/>
             <a:r>
               <a:rPr sz="3600" b="1">
                 <a:solidFill>
@@ -8696,7 +8869,7 @@
         <p:spPr>
           <a:xfrm>
             <a:off x="777240" y="1965960"/>
-            <a:ext cx="10607040" cy="4206240"/>
+            <a:ext cx="10607040" cy="790575"/>
           </a:xfrm>
           <a:prstGeom prst="rect">
             <a:avLst/>
@@ -8709,31 +8882,35 @@
           </a:bodyPr>
           <a:lstStyle/>
           <a:p>
-            <a:pPr algn="l"/>
-            <a:r>
-              <a:rPr b="0" sz="1800">
+            <a:pPr algn="ctr">
+              <a:spcAft>
+                <a:spcPts val="1000"/>
+              </a:spcAft>
+            </a:pPr>
+            <a:r>
+              <a:rPr sz="2100" b="0">
                 <a:solidFill>
                   <a:srgbClr val="FFFFFF"/>
                 </a:solidFill>
-                <a:latin typeface="Consolas"/>
+                <a:latin typeface="Calibri"/>
               </a:rPr>
               <a:t>[open the workbench] &gt; [the kernel remembers] &gt; [type decides] &gt; </a:t>
             </a:r>
             <a:r>
-              <a:rPr b="1" sz="1800">
+              <a:rPr sz="2100" b="1">
                 <a:solidFill>
                   <a:srgbClr val="FFFFFF"/>
                 </a:solidFill>
-                <a:latin typeface="Consolas"/>
+                <a:latin typeface="Calibri"/>
               </a:rPr>
               <a:t>[walk the records]</a:t>
             </a:r>
             <a:r>
-              <a:rPr b="0" sz="1800">
+              <a:rPr sz="2100" b="0">
                 <a:solidFill>
                   <a:srgbClr val="FFFFFF"/>
                 </a:solidFill>
-                <a:latin typeface="Consolas"/>
+                <a:latin typeface="Calibri"/>
               </a:rPr>
               <a:t> &gt; [the business answer]</a:t>
             </a:r>
@@ -8748,7 +8925,7 @@
         </p:nvSpPr>
         <p:spPr>
           <a:xfrm>
-            <a:off x="777240" y="6263640"/>
+            <a:off x="777240" y="6309360"/>
             <a:ext cx="10607040" cy="365760"/>
           </a:xfrm>
           <a:prstGeom prst="rect">
@@ -8757,13 +8934,13 @@
           <a:noFill/>
         </p:spPr>
         <p:txBody>
-          <a:bodyPr wrap="square">
-            <a:spAutoFit/>
-          </a:bodyPr>
-          <a:lstStyle/>
-          <a:p>
-            <a:r>
-              <a:rPr sz="1000" b="0">
+          <a:bodyPr wrap="none">
+            <a:spAutoFit/>
+          </a:bodyPr>
+          <a:lstStyle/>
+          <a:p>
+            <a:r>
+              <a:rPr sz="1000">
                 <a:solidFill>
                   <a:srgbClr val="5F6360"/>
                 </a:solidFill>
@@ -8879,7 +9056,7 @@
         <p:spPr>
           <a:xfrm>
             <a:off x="777240" y="1965960"/>
-            <a:ext cx="10607040" cy="4206240"/>
+            <a:ext cx="10607040" cy="1409700"/>
           </a:xfrm>
           <a:prstGeom prst="rect">
             <a:avLst/>
@@ -8892,9 +9069,13 @@
           </a:bodyPr>
           <a:lstStyle/>
           <a:p>
-            <a:pPr algn="l"/>
-            <a:r>
-              <a:rPr b="0" sz="2100">
+            <a:pPr>
+              <a:spcAft>
+                <a:spcPts val="1000"/>
+              </a:spcAft>
+            </a:pPr>
+            <a:r>
+              <a:rPr sz="2100" b="0">
                 <a:solidFill>
                   <a:srgbClr val="1C1C1A"/>
                 </a:solidFill>
@@ -8904,26 +9085,18 @@
             </a:r>
           </a:p>
           <a:p>
-            <a:pPr algn="l"/>
-            <a:r>
-              <a:rPr b="0" sz="2100">
+            <a:pPr>
+              <a:spcAft>
+                <a:spcPts val="1000"/>
+              </a:spcAft>
+            </a:pPr>
+            <a:r>
+              <a:rPr sz="2100" b="0">
                 <a:solidFill>
                   <a:srgbClr val="1C1C1A"/>
                 </a:solidFill>
                 <a:latin typeface="Calibri"/>
               </a:rPr>
-              <a:t> </a:t>
-            </a:r>
-          </a:p>
-          <a:p>
-            <a:pPr algn="l"/>
-            <a:r>
-              <a:rPr b="0" sz="2100">
-                <a:solidFill>
-                  <a:srgbClr val="1C1C1A"/>
-                </a:solidFill>
-                <a:latin typeface="Calibri"/>
-              </a:rPr>
               <a:t>Three pieces, and you already have all three: a loop that walks the records, a condition that asks one question of each record, and two accumulators that remember the answers.</a:t>
             </a:r>
           </a:p>
@@ -8937,7 +9110,7 @@
         </p:nvSpPr>
         <p:spPr>
           <a:xfrm>
-            <a:off x="777240" y="6263640"/>
+            <a:off x="777240" y="6309360"/>
             <a:ext cx="10607040" cy="365760"/>
           </a:xfrm>
           <a:prstGeom prst="rect">
@@ -8946,13 +9119,13 @@
           <a:noFill/>
         </p:spPr>
         <p:txBody>
-          <a:bodyPr wrap="square">
-            <a:spAutoFit/>
-          </a:bodyPr>
-          <a:lstStyle/>
-          <a:p>
-            <a:r>
-              <a:rPr sz="1000" b="0">
+          <a:bodyPr wrap="none">
+            <a:spAutoFit/>
+          </a:bodyPr>
+          <a:lstStyle/>
+          <a:p>
+            <a:r>
+              <a:rPr sz="1000">
                 <a:solidFill>
                   <a:srgbClr val="5F6360"/>
                 </a:solidFill>
@@ -9068,7 +9241,7 @@
         <p:spPr>
           <a:xfrm>
             <a:off x="777240" y="1965960"/>
-            <a:ext cx="10607040" cy="4206240"/>
+            <a:ext cx="10607040" cy="1657350"/>
           </a:xfrm>
           <a:prstGeom prst="rect">
             <a:avLst/>
@@ -9081,9 +9254,13 @@
           </a:bodyPr>
           <a:lstStyle/>
           <a:p>
-            <a:pPr algn="l"/>
-            <a:r>
-              <a:rPr sz="1700">
+            <a:pPr>
+              <a:spcAft>
+                <a:spcPts val="400"/>
+              </a:spcAft>
+            </a:pPr>
+            <a:r>
+              <a:rPr sz="1700" b="0">
                 <a:solidFill>
                   <a:srgbClr val="2B4A7D"/>
                 </a:solidFill>
@@ -9093,9 +9270,13 @@
             </a:r>
           </a:p>
           <a:p>
-            <a:pPr algn="l"/>
-            <a:r>
-              <a:rPr sz="1700">
+            <a:pPr>
+              <a:spcAft>
+                <a:spcPts val="400"/>
+              </a:spcAft>
+            </a:pPr>
+            <a:r>
+              <a:rPr sz="1700" b="0">
                 <a:solidFill>
                   <a:srgbClr val="2B4A7D"/>
                 </a:solidFill>
@@ -9105,9 +9286,13 @@
             </a:r>
           </a:p>
           <a:p>
-            <a:pPr algn="l"/>
-            <a:r>
-              <a:rPr sz="1700">
+            <a:pPr>
+              <a:spcAft>
+                <a:spcPts val="400"/>
+              </a:spcAft>
+            </a:pPr>
+            <a:r>
+              <a:rPr sz="1700" b="0">
                 <a:solidFill>
                   <a:srgbClr val="2B4A7D"/>
                 </a:solidFill>
@@ -9117,9 +9302,13 @@
             </a:r>
           </a:p>
           <a:p>
-            <a:pPr algn="l"/>
-            <a:r>
-              <a:rPr sz="1700">
+            <a:pPr>
+              <a:spcAft>
+                <a:spcPts val="400"/>
+              </a:spcAft>
+            </a:pPr>
+            <a:r>
+              <a:rPr sz="1700" b="0">
                 <a:solidFill>
                   <a:srgbClr val="2B4A7D"/>
                 </a:solidFill>
@@ -9129,9 +9318,13 @@
             </a:r>
           </a:p>
           <a:p>
-            <a:pPr algn="l"/>
-            <a:r>
-              <a:rPr sz="1700">
+            <a:pPr>
+              <a:spcAft>
+                <a:spcPts val="400"/>
+              </a:spcAft>
+            </a:pPr>
+            <a:r>
+              <a:rPr sz="1700" b="0">
                 <a:solidFill>
                   <a:srgbClr val="2B4A7D"/>
                 </a:solidFill>
@@ -9141,9 +9334,13 @@
             </a:r>
           </a:p>
           <a:p>
-            <a:pPr algn="l"/>
-            <a:r>
-              <a:rPr sz="1700">
+            <a:pPr>
+              <a:spcAft>
+                <a:spcPts val="400"/>
+              </a:spcAft>
+            </a:pPr>
+            <a:r>
+              <a:rPr sz="1700" b="0">
                 <a:solidFill>
                   <a:srgbClr val="2B4A7D"/>
                 </a:solidFill>
@@ -9152,27 +9349,42 @@
               <a:t>        total = total + r["amount"]</a:t>
             </a:r>
           </a:p>
-          <a:p>
-            <a:pPr algn="l"/>
-            <a:r>
-              <a:rPr b="0" sz="2100">
+        </p:txBody>
+      </p:sp>
+      <p:sp>
+        <p:nvSpPr>
+          <p:cNvPr id="5" name="TextBox 4"/>
+          <p:cNvSpPr txBox="1"/>
+          <p:nvPr/>
+        </p:nvSpPr>
+        <p:spPr>
+          <a:xfrm>
+            <a:off x="777240" y="3760470"/>
+            <a:ext cx="10607040" cy="542925"/>
+          </a:xfrm>
+          <a:prstGeom prst="rect">
+            <a:avLst/>
+          </a:prstGeom>
+          <a:noFill/>
+        </p:spPr>
+        <p:txBody>
+          <a:bodyPr wrap="square">
+            <a:spAutoFit/>
+          </a:bodyPr>
+          <a:lstStyle/>
+          <a:p>
+            <a:pPr>
+              <a:spcAft>
+                <a:spcPts val="1000"/>
+              </a:spcAft>
+            </a:pPr>
+            <a:r>
+              <a:rPr sz="2100" b="0">
                 <a:solidFill>
                   <a:srgbClr val="1C1C1A"/>
                 </a:solidFill>
                 <a:latin typeface="Calibri"/>
               </a:rPr>
-              <a:t> </a:t>
-            </a:r>
-          </a:p>
-          <a:p>
-            <a:pPr algn="l"/>
-            <a:r>
-              <a:rPr b="0" sz="2100">
-                <a:solidFill>
-                  <a:srgbClr val="1C1C1A"/>
-                </a:solidFill>
-                <a:latin typeface="Calibri"/>
-              </a:rPr>
               <a:t>Run it.</a:t>
             </a:r>
           </a:p>
@@ -9180,13 +9392,13 @@
       </p:sp>
       <p:sp>
         <p:nvSpPr>
-          <p:cNvPr id="5" name="TextBox 4"/>
-          <p:cNvSpPr txBox="1"/>
-          <p:nvPr/>
-        </p:nvSpPr>
-        <p:spPr>
-          <a:xfrm>
-            <a:off x="777240" y="6263640"/>
+          <p:cNvPr id="6" name="TextBox 5"/>
+          <p:cNvSpPr txBox="1"/>
+          <p:nvPr/>
+        </p:nvSpPr>
+        <p:spPr>
+          <a:xfrm>
+            <a:off x="777240" y="6309360"/>
             <a:ext cx="10607040" cy="365760"/>
           </a:xfrm>
           <a:prstGeom prst="rect">
@@ -9195,13 +9407,13 @@
           <a:noFill/>
         </p:spPr>
         <p:txBody>
-          <a:bodyPr wrap="square">
-            <a:spAutoFit/>
-          </a:bodyPr>
-          <a:lstStyle/>
-          <a:p>
-            <a:r>
-              <a:rPr sz="1000" b="0">
+          <a:bodyPr wrap="none">
+            <a:spAutoFit/>
+          </a:bodyPr>
+          <a:lstStyle/>
+          <a:p>
+            <a:r>
+              <a:rPr sz="1000">
                 <a:solidFill>
                   <a:srgbClr val="5F6360"/>
                 </a:solidFill>
@@ -9317,7 +9529,7 @@
         <p:spPr>
           <a:xfrm>
             <a:off x="777240" y="1965960"/>
-            <a:ext cx="10607040" cy="4206240"/>
+            <a:ext cx="10607040" cy="502920"/>
           </a:xfrm>
           <a:prstGeom prst="rect">
             <a:avLst/>
@@ -9330,9 +9542,13 @@
           </a:bodyPr>
           <a:lstStyle/>
           <a:p>
-            <a:pPr algn="l"/>
-            <a:r>
-              <a:rPr sz="1700">
+            <a:pPr>
+              <a:spcAft>
+                <a:spcPts val="400"/>
+              </a:spcAft>
+            </a:pPr>
+            <a:r>
+              <a:rPr sz="1700" b="0">
                 <a:solidFill>
                   <a:srgbClr val="2B4A7D"/>
                 </a:solidFill>
@@ -9341,51 +9557,58 @@
               <a:t>TypeError: '&gt;' not supported between instances of 'str' and 'int'</a:t>
             </a:r>
           </a:p>
-          <a:p>
-            <a:pPr algn="l"/>
-            <a:r>
-              <a:rPr b="0" sz="2100">
+        </p:txBody>
+      </p:sp>
+      <p:sp>
+        <p:nvSpPr>
+          <p:cNvPr id="5" name="TextBox 4"/>
+          <p:cNvSpPr txBox="1"/>
+          <p:nvPr/>
+        </p:nvSpPr>
+        <p:spPr>
+          <a:xfrm>
+            <a:off x="777240" y="2606040"/>
+            <a:ext cx="10607040" cy="1162050"/>
+          </a:xfrm>
+          <a:prstGeom prst="rect">
+            <a:avLst/>
+          </a:prstGeom>
+          <a:noFill/>
+        </p:spPr>
+        <p:txBody>
+          <a:bodyPr wrap="square">
+            <a:spAutoFit/>
+          </a:bodyPr>
+          <a:lstStyle/>
+          <a:p>
+            <a:pPr>
+              <a:spcAft>
+                <a:spcPts val="1000"/>
+              </a:spcAft>
+            </a:pPr>
+            <a:r>
+              <a:rPr sz="2100" b="0">
                 <a:solidFill>
                   <a:srgbClr val="1C1C1A"/>
                 </a:solidFill>
                 <a:latin typeface="Calibri"/>
               </a:rPr>
-              <a:t> </a:t>
-            </a:r>
-          </a:p>
-          <a:p>
-            <a:pPr algn="l"/>
-            <a:r>
-              <a:rPr b="0" sz="2100">
+              <a:t>It stops on the very first record in the file, which is KR4200 storing its amount as the text "4500".</a:t>
+            </a:r>
+          </a:p>
+          <a:p>
+            <a:pPr>
+              <a:spcAft>
+                <a:spcPts val="1000"/>
+              </a:spcAft>
+            </a:pPr>
+            <a:r>
+              <a:rPr sz="2100" b="0">
                 <a:solidFill>
                   <a:srgbClr val="1C1C1A"/>
                 </a:solidFill>
                 <a:latin typeface="Calibri"/>
               </a:rPr>
-              <a:t>It stops on the very first record in the file, which is KR4200 storing its amount as the text "4500".</a:t>
-            </a:r>
-          </a:p>
-          <a:p>
-            <a:pPr algn="l"/>
-            <a:r>
-              <a:rPr b="0" sz="2100">
-                <a:solidFill>
-                  <a:srgbClr val="1C1C1A"/>
-                </a:solidFill>
-                <a:latin typeface="Calibri"/>
-              </a:rPr>
-              <a:t> </a:t>
-            </a:r>
-          </a:p>
-          <a:p>
-            <a:pPr algn="l"/>
-            <a:r>
-              <a:rPr b="0" sz="2100">
-                <a:solidFill>
-                  <a:srgbClr val="1C1C1A"/>
-                </a:solidFill>
-                <a:latin typeface="Calibri"/>
-              </a:rPr>
               <a:t>You met this error in half one, and here it is inside the cell you are typing yourself.</a:t>
             </a:r>
           </a:p>
@@ -9393,13 +9616,13 @@
       </p:sp>
       <p:sp>
         <p:nvSpPr>
-          <p:cNvPr id="5" name="TextBox 4"/>
-          <p:cNvSpPr txBox="1"/>
-          <p:nvPr/>
-        </p:nvSpPr>
-        <p:spPr>
-          <a:xfrm>
-            <a:off x="777240" y="6263640"/>
+          <p:cNvPr id="6" name="TextBox 5"/>
+          <p:cNvSpPr txBox="1"/>
+          <p:nvPr/>
+        </p:nvSpPr>
+        <p:spPr>
+          <a:xfrm>
+            <a:off x="777240" y="6309360"/>
             <a:ext cx="10607040" cy="365760"/>
           </a:xfrm>
           <a:prstGeom prst="rect">
@@ -9408,13 +9631,13 @@
           <a:noFill/>
         </p:spPr>
         <p:txBody>
-          <a:bodyPr wrap="square">
-            <a:spAutoFit/>
-          </a:bodyPr>
-          <a:lstStyle/>
-          <a:p>
-            <a:r>
-              <a:rPr sz="1000" b="0">
+          <a:bodyPr wrap="none">
+            <a:spAutoFit/>
+          </a:bodyPr>
+          <a:lstStyle/>
+          <a:p>
+            <a:r>
+              <a:rPr sz="1000">
                 <a:solidFill>
                   <a:srgbClr val="5F6360"/>
                 </a:solidFill>
@@ -9530,7 +9753,7 @@
         <p:spPr>
           <a:xfrm>
             <a:off x="777240" y="1965960"/>
-            <a:ext cx="10607040" cy="4206240"/>
+            <a:ext cx="10607040" cy="666750"/>
           </a:xfrm>
           <a:prstGeom prst="rect">
             <a:avLst/>
@@ -9543,9 +9766,13 @@
           </a:bodyPr>
           <a:lstStyle/>
           <a:p>
-            <a:pPr algn="l"/>
-            <a:r>
-              <a:rPr sz="1700">
+            <a:pPr>
+              <a:spcAft>
+                <a:spcPts val="400"/>
+              </a:spcAft>
+            </a:pPr>
+            <a:r>
+              <a:rPr sz="1700" b="0">
                 <a:solidFill>
                   <a:srgbClr val="2B4A7D"/>
                 </a:solidFill>
@@ -9555,9 +9782,13 @@
             </a:r>
           </a:p>
           <a:p>
-            <a:pPr algn="l"/>
-            <a:r>
-              <a:rPr sz="1700">
+            <a:pPr>
+              <a:spcAft>
+                <a:spcPts val="400"/>
+              </a:spcAft>
+            </a:pPr>
+            <a:r>
+              <a:rPr sz="1700" b="0">
                 <a:solidFill>
                   <a:srgbClr val="2B4A7D"/>
                 </a:solidFill>
@@ -9566,60 +9797,58 @@
               <a:t>    if int(r["amount"]) &gt; 2000:</a:t>
             </a:r>
           </a:p>
-          <a:p>
-            <a:pPr algn="l"/>
-            <a:r>
-              <a:rPr b="0" sz="2100">
+        </p:txBody>
+      </p:sp>
+      <p:sp>
+        <p:nvSpPr>
+          <p:cNvPr id="5" name="TextBox 4"/>
+          <p:cNvSpPr txBox="1"/>
+          <p:nvPr/>
+        </p:nvSpPr>
+        <p:spPr>
+          <a:xfrm>
+            <a:off x="777240" y="2769870"/>
+            <a:ext cx="10607040" cy="1409700"/>
+          </a:xfrm>
+          <a:prstGeom prst="rect">
+            <a:avLst/>
+          </a:prstGeom>
+          <a:noFill/>
+        </p:spPr>
+        <p:txBody>
+          <a:bodyPr wrap="square">
+            <a:spAutoFit/>
+          </a:bodyPr>
+          <a:lstStyle/>
+          <a:p>
+            <a:pPr>
+              <a:spcAft>
+                <a:spcPts val="1000"/>
+              </a:spcAft>
+            </a:pPr>
+            <a:r>
+              <a:rPr sz="2100" b="0">
                 <a:solidFill>
                   <a:srgbClr val="1C1C1A"/>
                 </a:solidFill>
                 <a:latin typeface="Calibri"/>
               </a:rPr>
-              <a:t> </a:t>
-            </a:r>
-          </a:p>
-          <a:p>
-            <a:pPr algn="l"/>
-            <a:r>
-              <a:rPr b="0" sz="1800">
-                <a:solidFill>
-                  <a:srgbClr val="2B4A7D"/>
-                </a:solidFill>
-                <a:latin typeface="Consolas"/>
-              </a:rPr>
-              <a:t>int()</a:t>
-            </a:r>
-            <a:r>
-              <a:rPr b="0" sz="2100">
+              <a:t>int() takes a value and hands back the whole number it stands for. That is all it is today, a converter you call at the moment you need a number.</a:t>
+            </a:r>
+          </a:p>
+          <a:p>
+            <a:pPr>
+              <a:spcAft>
+                <a:spcPts val="1000"/>
+              </a:spcAft>
+            </a:pPr>
+            <a:r>
+              <a:rPr sz="2100" b="0">
                 <a:solidFill>
                   <a:srgbClr val="1C1C1A"/>
                 </a:solidFill>
                 <a:latin typeface="Calibri"/>
               </a:rPr>
-              <a:t> takes a value and hands back the whole number it stands for. That is all it is today, a converter you call at the moment you need a number.</a:t>
-            </a:r>
-          </a:p>
-          <a:p>
-            <a:pPr algn="l"/>
-            <a:r>
-              <a:rPr b="0" sz="2100">
-                <a:solidFill>
-                  <a:srgbClr val="1C1C1A"/>
-                </a:solidFill>
-                <a:latin typeface="Calibri"/>
-              </a:rPr>
-              <a:t> </a:t>
-            </a:r>
-          </a:p>
-          <a:p>
-            <a:pPr algn="l"/>
-            <a:r>
-              <a:rPr b="0" sz="2100">
-                <a:solidFill>
-                  <a:srgbClr val="1C1C1A"/>
-                </a:solidFill>
-                <a:latin typeface="Calibri"/>
-              </a:rPr>
               <a:t>You put it where the comparison happens, so the record arrives as text and the comparison still gets a number.</a:t>
             </a:r>
           </a:p>
@@ -9627,13 +9856,13 @@
       </p:sp>
       <p:sp>
         <p:nvSpPr>
-          <p:cNvPr id="5" name="TextBox 4"/>
-          <p:cNvSpPr txBox="1"/>
-          <p:nvPr/>
-        </p:nvSpPr>
-        <p:spPr>
-          <a:xfrm>
-            <a:off x="777240" y="6263640"/>
+          <p:cNvPr id="6" name="TextBox 5"/>
+          <p:cNvSpPr txBox="1"/>
+          <p:nvPr/>
+        </p:nvSpPr>
+        <p:spPr>
+          <a:xfrm>
+            <a:off x="777240" y="6309360"/>
             <a:ext cx="10607040" cy="365760"/>
           </a:xfrm>
           <a:prstGeom prst="rect">
@@ -9642,13 +9871,13 @@
           <a:noFill/>
         </p:spPr>
         <p:txBody>
-          <a:bodyPr wrap="square">
-            <a:spAutoFit/>
-          </a:bodyPr>
-          <a:lstStyle/>
-          <a:p>
-            <a:r>
-              <a:rPr sz="1000" b="0">
+          <a:bodyPr wrap="none">
+            <a:spAutoFit/>
+          </a:bodyPr>
+          <a:lstStyle/>
+          <a:p>
+            <a:r>
+              <a:rPr sz="1000">
                 <a:solidFill>
                   <a:srgbClr val="5F6360"/>
                 </a:solidFill>
@@ -9764,7 +9993,7 @@
         <p:spPr>
           <a:xfrm>
             <a:off x="777240" y="1965960"/>
-            <a:ext cx="10607040" cy="4206240"/>
+            <a:ext cx="10607040" cy="2152650"/>
           </a:xfrm>
           <a:prstGeom prst="rect">
             <a:avLst/>
@@ -9777,9 +10006,13 @@
           </a:bodyPr>
           <a:lstStyle/>
           <a:p>
-            <a:pPr algn="l"/>
-            <a:r>
-              <a:rPr sz="1700">
+            <a:pPr>
+              <a:spcAft>
+                <a:spcPts val="400"/>
+              </a:spcAft>
+            </a:pPr>
+            <a:r>
+              <a:rPr sz="1700" b="0">
                 <a:solidFill>
                   <a:srgbClr val="2B4A7D"/>
                 </a:solidFill>
@@ -9789,9 +10022,13 @@
             </a:r>
           </a:p>
           <a:p>
-            <a:pPr algn="l"/>
-            <a:r>
-              <a:rPr sz="1700">
+            <a:pPr>
+              <a:spcAft>
+                <a:spcPts val="400"/>
+              </a:spcAft>
+            </a:pPr>
+            <a:r>
+              <a:rPr sz="1700" b="0">
                 <a:solidFill>
                   <a:srgbClr val="2B4A7D"/>
                 </a:solidFill>
@@ -9801,9 +10038,13 @@
             </a:r>
           </a:p>
           <a:p>
-            <a:pPr algn="l"/>
-            <a:r>
-              <a:rPr sz="1700">
+            <a:pPr>
+              <a:spcAft>
+                <a:spcPts val="400"/>
+              </a:spcAft>
+            </a:pPr>
+            <a:r>
+              <a:rPr sz="1700" b="0">
                 <a:solidFill>
                   <a:srgbClr val="2B4A7D"/>
                 </a:solidFill>
@@ -9813,9 +10054,13 @@
             </a:r>
           </a:p>
           <a:p>
-            <a:pPr algn="l"/>
-            <a:r>
-              <a:rPr sz="1700">
+            <a:pPr>
+              <a:spcAft>
+                <a:spcPts val="400"/>
+              </a:spcAft>
+            </a:pPr>
+            <a:r>
+              <a:rPr sz="1700" b="0">
                 <a:solidFill>
                   <a:srgbClr val="2B4A7D"/>
                 </a:solidFill>
@@ -9825,9 +10070,13 @@
             </a:r>
           </a:p>
           <a:p>
-            <a:pPr algn="l"/>
-            <a:r>
-              <a:rPr sz="1700">
+            <a:pPr>
+              <a:spcAft>
+                <a:spcPts val="400"/>
+              </a:spcAft>
+            </a:pPr>
+            <a:r>
+              <a:rPr sz="1700" b="0">
                 <a:solidFill>
                   <a:srgbClr val="2B4A7D"/>
                 </a:solidFill>
@@ -9837,9 +10086,13 @@
             </a:r>
           </a:p>
           <a:p>
-            <a:pPr algn="l"/>
-            <a:r>
-              <a:rPr sz="1700">
+            <a:pPr>
+              <a:spcAft>
+                <a:spcPts val="400"/>
+              </a:spcAft>
+            </a:pPr>
+            <a:r>
+              <a:rPr sz="1700" b="0">
                 <a:solidFill>
                   <a:srgbClr val="2B4A7D"/>
                 </a:solidFill>
@@ -9849,74 +10102,103 @@
             </a:r>
           </a:p>
           <a:p>
-            <a:pPr algn="l"/>
-            <a:r>
-              <a:rPr sz="1700">
+            <a:pPr>
+              <a:spcAft>
+                <a:spcPts val="400"/>
+              </a:spcAft>
+            </a:pPr>
+          </a:p>
+          <a:p>
+            <a:pPr>
+              <a:spcAft>
+                <a:spcPts val="400"/>
+              </a:spcAft>
+            </a:pPr>
+            <a:r>
+              <a:rPr sz="1700" b="0">
                 <a:solidFill>
                   <a:srgbClr val="2B4A7D"/>
                 </a:solidFill>
                 <a:latin typeface="Consolas"/>
               </a:rPr>
-              <a:t> </a:t>
-            </a:r>
-          </a:p>
-          <a:p>
-            <a:pPr algn="l"/>
-            <a:r>
-              <a:rPr sz="1700">
+              <a:t>print(count, total)</a:t>
+            </a:r>
+          </a:p>
+        </p:txBody>
+      </p:sp>
+      <p:sp>
+        <p:nvSpPr>
+          <p:cNvPr id="5" name="TextBox 4"/>
+          <p:cNvSpPr txBox="1"/>
+          <p:nvPr/>
+        </p:nvSpPr>
+        <p:spPr>
+          <a:xfrm>
+            <a:off x="777240" y="4255770"/>
+            <a:ext cx="10607040" cy="502920"/>
+          </a:xfrm>
+          <a:prstGeom prst="rect">
+            <a:avLst/>
+          </a:prstGeom>
+          <a:noFill/>
+        </p:spPr>
+        <p:txBody>
+          <a:bodyPr wrap="square">
+            <a:spAutoFit/>
+          </a:bodyPr>
+          <a:lstStyle/>
+          <a:p>
+            <a:pPr>
+              <a:spcAft>
+                <a:spcPts val="400"/>
+              </a:spcAft>
+            </a:pPr>
+            <a:r>
+              <a:rPr sz="1700" b="0">
                 <a:solidFill>
                   <a:srgbClr val="2B4A7D"/>
                 </a:solidFill>
                 <a:latin typeface="Consolas"/>
               </a:rPr>
-              <a:t>print(count, total)</a:t>
-            </a:r>
-          </a:p>
-          <a:p>
-            <a:pPr algn="l"/>
-            <a:r>
-              <a:rPr b="0" sz="2100">
+              <a:t>13 35020</a:t>
+            </a:r>
+          </a:p>
+        </p:txBody>
+      </p:sp>
+      <p:sp>
+        <p:nvSpPr>
+          <p:cNvPr id="6" name="TextBox 5"/>
+          <p:cNvSpPr txBox="1"/>
+          <p:nvPr/>
+        </p:nvSpPr>
+        <p:spPr>
+          <a:xfrm>
+            <a:off x="777240" y="4895850"/>
+            <a:ext cx="10607040" cy="790575"/>
+          </a:xfrm>
+          <a:prstGeom prst="rect">
+            <a:avLst/>
+          </a:prstGeom>
+          <a:noFill/>
+        </p:spPr>
+        <p:txBody>
+          <a:bodyPr wrap="square">
+            <a:spAutoFit/>
+          </a:bodyPr>
+          <a:lstStyle/>
+          <a:p>
+            <a:pPr>
+              <a:spcAft>
+                <a:spcPts val="1000"/>
+              </a:spcAft>
+            </a:pPr>
+            <a:r>
+              <a:rPr sz="2100" b="0">
                 <a:solidFill>
                   <a:srgbClr val="1C1C1A"/>
                 </a:solidFill>
                 <a:latin typeface="Calibri"/>
               </a:rPr>
-              <a:t> </a:t>
-            </a:r>
-          </a:p>
-          <a:p>
-            <a:pPr algn="l"/>
-            <a:r>
-              <a:rPr sz="1700">
-                <a:solidFill>
-                  <a:srgbClr val="2B4A7D"/>
-                </a:solidFill>
-                <a:latin typeface="Consolas"/>
-              </a:rPr>
-              <a:t>13 35020</a:t>
-            </a:r>
-          </a:p>
-          <a:p>
-            <a:pPr algn="l"/>
-            <a:r>
-              <a:rPr b="0" sz="2100">
-                <a:solidFill>
-                  <a:srgbClr val="1C1C1A"/>
-                </a:solidFill>
-                <a:latin typeface="Calibri"/>
-              </a:rPr>
-              <a:t> </a:t>
-            </a:r>
-          </a:p>
-          <a:p>
-            <a:pPr algn="l"/>
-            <a:r>
-              <a:rPr b="0" sz="2100">
-                <a:solidFill>
-                  <a:srgbClr val="1C1C1A"/>
-                </a:solidFill>
-                <a:latin typeface="Calibri"/>
-              </a:rPr>
               <a:t>13 orders are above Rs 2,000 and they total Rs 35,020, and that is a sentence you can say out loud to the person who asked.</a:t>
             </a:r>
           </a:p>
@@ -9924,13 +10206,13 @@
       </p:sp>
       <p:sp>
         <p:nvSpPr>
-          <p:cNvPr id="5" name="TextBox 4"/>
-          <p:cNvSpPr txBox="1"/>
-          <p:nvPr/>
-        </p:nvSpPr>
-        <p:spPr>
-          <a:xfrm>
-            <a:off x="777240" y="6263640"/>
+          <p:cNvPr id="7" name="TextBox 6"/>
+          <p:cNvSpPr txBox="1"/>
+          <p:nvPr/>
+        </p:nvSpPr>
+        <p:spPr>
+          <a:xfrm>
+            <a:off x="777240" y="6309360"/>
             <a:ext cx="10607040" cy="365760"/>
           </a:xfrm>
           <a:prstGeom prst="rect">
@@ -9939,13 +10221,13 @@
           <a:noFill/>
         </p:spPr>
         <p:txBody>
-          <a:bodyPr wrap="square">
-            <a:spAutoFit/>
-          </a:bodyPr>
-          <a:lstStyle/>
-          <a:p>
-            <a:r>
-              <a:rPr sz="1000" b="0">
+          <a:bodyPr wrap="none">
+            <a:spAutoFit/>
+          </a:bodyPr>
+          <a:lstStyle/>
+          <a:p>
+            <a:r>
+              <a:rPr sz="1000">
                 <a:solidFill>
                   <a:srgbClr val="5F6360"/>
                 </a:solidFill>
